--- a/Apresentacao/Apresentacao_XVI_Seminario_PIBITI.pptx
+++ b/Apresentacao/Apresentacao_XVI_Seminario_PIBITI.pptx
@@ -820,7 +820,7 @@
           <a:lstStyle/>
           <a:p>
             <a:r>
-              <a:t>[~45 s] A ferramenta foi validada num sistema energético nacional estilizado com 70 combustíveis em 5 estágios, 101 tecnologias e 106 arestas, incluindo 25 tecnologias-fonte e 4 fluxos reversos. Também foi testada com bases de topologia aleatória, com casos patológicos, para confirmar que o layout não depende deste sistema específico. A figura é só um recorte: o diagrama inteiro tem milhares de pixels nos dois eixos, por isso zoom e destaque são essenciais. O ganho principal: o que levava dias à mão agora se atualiza em segundos, e manter o diagrama sincronizado com o modelo passa a custar praticamente zero.</a:t>
+              <a:t>[~45 s] A ferramenta foi validada num sistema energético nacional estilizado com 70 combustíveis em 5 estágios, 101 tecnologias e 106 ligações declaradas na planilha, incluindo 25 tecnologias-fonte e 4 fluxos reversos. Também foi testada com bases de topologia aleatória, com casos patológicos, para confirmar que o layout não depende deste sistema específico. A figura é só um recorte: o diagrama inteiro tem milhares de pixels nos dois eixos, por isso zoom e destaque são essenciais. O ganho principal: o que levava dias à mão agora se atualiza em segundos, e manter o diagrama sincronizado com o modelo passa a custar praticamente zero.</a:t>
             </a:r>
           </a:p>
         </p:txBody>
@@ -11923,7 +11923,7 @@
                 </a:solidFill>
                 <a:latin typeface="Calibri"/>
               </a:rPr>
-              <a:t>Recorte do diagrama gerado: combustíveis primários e secundários</a:t>
+              <a:t>Recorte do diagrama gerado automaticamente</a:t>
             </a:r>
           </a:p>
         </p:txBody>
@@ -12146,7 +12146,7 @@
       </p:sp>
       <p:sp>
         <p:nvSpPr>
-          <p:cNvPr id="9" name="Stat arestas"/>
+          <p:cNvPr id="9" name="Stat ligações declaradas"/>
           <p:cNvSpPr/>
           <p:nvPr/>
         </p:nvSpPr>
@@ -12211,7 +12211,7 @@
                 </a:solidFill>
                 <a:latin typeface="Calibri"/>
               </a:rPr>
-              <a:t>arestas</a:t>
+              <a:t>ligações declaradas</a:t>
             </a:r>
           </a:p>
         </p:txBody>

--- a/Apresentacao/Apresentacao_XVI_Seminario_PIBITI.pptx
+++ b/Apresentacao/Apresentacao_XVI_Seminario_PIBITI.pptx
@@ -820,7 +820,7 @@
           <a:lstStyle/>
           <a:p>
             <a:r>
-              <a:t>[~45 s] A ferramenta foi validada num sistema energético nacional estilizado com 70 combustíveis em 5 estágios, 101 tecnologias e 106 ligações declaradas na planilha, incluindo 25 tecnologias-fonte e 4 fluxos reversos. Também foi testada com bases de topologia aleatória, com casos patológicos, para confirmar que o layout não depende deste sistema específico. A figura é só um recorte: o diagrama inteiro tem milhares de pixels nos dois eixos, por isso zoom e destaque são essenciais. O ganho principal: o que levava dias à mão agora se atualiza em segundos, e manter o diagrama sincronizado com o modelo passa a custar praticamente zero.</a:t>
+              <a:t>[~45 s] A ferramenta foi validada com a estrutura do sistema energético brasileiro: 70 combustíveis em 5 estágios, 101 tecnologias e 106 ligações declaradas na planilha, incluindo 4 conexões de retorno. É a estrutura do sistema, ou seja, quais combustíveis e tecnologias existem e como se ligam, sem quantidades de energia. Também foi testada com bases de topologia aleatória, com casos difíceis, para confirmar que a disposição não depende deste sistema específico. A figura é só um detalhe: o diagrama inteiro tem milhares de pixels nos dois eixos, por isso zoom e destaque são essenciais. O ganho principal: o que levava dias à mão agora se atualiza em segundos, e o diagrama passa a acompanhar o modelo automaticamente.</a:t>
             </a:r>
           </a:p>
         </p:txBody>
@@ -878,7 +878,7 @@
           <a:lstStyle/>
           <a:p>
             <a:r>
-              <a:t>[~50 s] Para concluir: entregamos um gerador automático e interativo de diagramas RES, funcional e documentado. O ganho mais importante é na manutenção: manter o diagrama sincronizado com o modelo passa a custar praticamente zero. O algoritmo de nós fantasmas resolve a sobreposição só com transformações de tabela, e o método opera sobre a forma do grafo, então serve para outros fluxos em camadas, como materiais e cadeias produtivas. Como próximos passos: parametrizar o layout, reativar a rastreabilidade de forma otimizada, dimensionar as linhas pelo volume de fluxo e usar o grafo para diagnosticar inconsistências no modelo. Obrigado.</a:t>
+              <a:t>[~50 s] Para concluir: entregamos um gerador automático e interativo do diagrama de fluxo de energia, funcional e documentado. O ganho mais importante é a atualização automática: o diagrama acompanha o modelo sem redesenho. O algoritmo de nós fantasmas resolve a sobreposição só com transformações de tabela, e o método opera sobre a forma do grafo, então tem aplicação geral, para outros fluxos em camadas, como materiais e cadeias produtivas. Como trabalhos futuros: parametrizar a disposição, reativar a rastreabilidade de forma otimizada, dimensionar as linhas pelo volume de fluxo e usar o grafo para diagnosticar inconsistências no modelo. O código está público no GitHub. Obrigado.</a:t>
             </a:r>
           </a:p>
         </p:txBody>
@@ -994,7 +994,7 @@
           <a:lstStyle/>
           <a:p>
             <a:r>
-              <a:t>[~50 s] A proposta submetida era aplicar computação paralela à simulação estocástica de redes elétricas com recursos energéticos distribuídos, usando OpenDSS e Python. Ao longo do ano houve a necessidade de mudar o enfoque: atuei em apoio ao Prof. Bruno Borba no projeto de P&amp;D 'Impactos do Crescimento da Frota de Veículos Elétricos no Sistema Eletro-Energético e Avaliação do Ciclo de Vida em Comparação com Veículos à Combustão', por causa da alta demanda de trabalho desse projeto. O tema continua ligado à proposta: planejamento energético do sistema elétrico, REDs e VEs. É comum que o bolsista faça um trabalho um pouco diferente do submetido. No P&amp;D, o planejamento é feito com o OSeMOSYS, e foi dali que surgiu o problema que este trabalho resolve.</a:t>
+              <a:t>[~50 s] A proposta submetida era aplicar computação paralela à simulação estocástica de redes elétricas com recursos energéticos distribuídos, usando OpenDSS e Python. Ao longo do ano houve a necessidade de mudar o enfoque: atuei em apoio ao Prof. Bruno Borba no projeto de Pesquisa e Desenvolvimento 'Impactos do Crescimento da Frota de Veículos Elétricos no Sistema Eletro-Energético e Avaliação do Ciclo de Vida em Comparação com Veículos à Combustão', por causa da alta demanda de trabalho desse projeto. O tema continua ligado à proposta: planejamento energético do sistema elétrico. No P&amp;D, o planejamento é feito com o OSeMOSYS, uma ferramenta de planejamento energético, e foi dali que surgiu o problema que este trabalho resolve.</a:t>
             </a:r>
           </a:p>
         </p:txBody>
@@ -1052,7 +1052,7 @@
           <a:lstStyle/>
           <a:p>
             <a:r>
-              <a:t>[~50 s] No OSeMOSYS, o sistema energético é descrito como uma rede: combustíveis, organizados por estágio da cadeia energética, ligados por tecnologias de extração, conversão, transporte e uso final. O desenho dessa rede é o RES, a especificação visual do modelo. À esquerda está o RES de referência do projeto, desenhado à mão. Um RES realista tem cerca de 170 nós e mais de 100 arestas e leva dias para desenhar. O problema maior é a manutenção: qualquer alteração no modelo invalida o desenho, que congela numa versão antiga e deixa de documentar o modelo.</a:t>
+              <a:t>[~50 s] No OSeMOSYS, o sistema energético é descrito como uma rede: combustíveis, organizados por estágio da cadeia energética, ligados por tecnologias de extração, conversão, transporte e uso final. O desenho dessa rede é o Diagrama de Fluxo de Energia de Referência, a especificação visual do modelo. À esquerda está o diagrama de referência do projeto, desenhado à mão. Um diagrama realista tem cerca de 170 nós e mais de 100 arestas e leva dias para desenhar. O problema maior é a manutenção: qualquer alteração no modelo invalida o desenho, que congela numa versão antiga e deixa de documentar o modelo.</a:t>
             </a:r>
           </a:p>
         </p:txBody>
@@ -1110,7 +1110,7 @@
           <a:lstStyle/>
           <a:p>
             <a:r>
-              <a:t>[~50 s] Gerar o RES automaticamente não é novidade. O otoole, suíte oficial do OSeMOSYS, faz isso com o Graphviz, mas a coluna de cada nó é inferida pela topologia, e não pelo estágio que o modelador declarou; os combustíveis viram pontos sem rótulo; e a saída é uma imagem estática. Os visuais de Sankey do Power BI codificam volume, derivam o eixo do grafo e não tratam fluxos reversos. A lacuna é gerar um RES que respeite o estágio declarado, com combustíveis rotulados, fluxos reversos roteados e interatividade, dentro da plataforma de BI. Na revisão feita, não encontramos implementação equivalente nativa em plataforma de BI.</a:t>
+              <a:t>[~50 s] Gerar o diagrama automaticamente não é novidade. O otoole, ferramenta oficial do OSeMOSYS, faz isso com o Graphviz, mas a coluna de cada nó é inferida pela topologia, e não pelo estágio que o modelador declarou; os combustíveis viram pontos sem rótulo; e a saída é uma imagem estática. Os diagramas de Sankey do Power BI codificam volume, derivam o eixo do grafo e não tratam as conexões de retorno. A lacuna é gerar um diagrama que respeite o estágio declarado, com combustíveis rotulados, conexões de retorno desenhadas e interatividade, dentro do Power BI. Na revisão feita, não encontramos implementação equivalente.</a:t>
             </a:r>
           </a:p>
         </p:txBody>
@@ -1168,7 +1168,7 @@
           <a:lstStyle/>
           <a:p>
             <a:r>
-              <a:t>[~40 s] O objetivo geral foi desenvolver o Diagrama Dinâmico de Fluxo Energético, o DDFE: gerar automaticamente o RES completo e interativo a partir das duas tabelas que o modelador já mantém, dentro do Power BI. Os objetivos específicos foram: preservar a semântica do estágio; calcular o layout sem sobreposição, incluindo fluxos reversos; permitir isolar cadeias com um clique; e manter o código versionado e documentado.</a:t>
+              <a:t>[~40 s] O objetivo geral foi desenvolver o Diagrama Dinâmico de Fluxo Energético, o DDFE: gerar automaticamente o diagrama de fluxo de energia completo e interativo a partir das duas tabelas que o modelador já mantém, dentro do Power BI. Os objetivos específicos foram: preservar a semântica do estágio; calcular a disposição sem sobreposição, incluindo as conexões de retorno; permitir isolar cadeias com um clique; e manter o código versionado e documentado, em repositório público.</a:t>
             </a:r>
           </a:p>
         </p:txBody>
@@ -1226,7 +1226,7 @@
           <a:lstStyle/>
           <a:p>
             <a:r>
-              <a:t>[~50 s] Em vez de usar um visual pronto, construímos um motor em duas camadas. A entrada são duas abas de Excel: Fuels, com combustível, estágio e cor; e Techs, com tecnologia, entrada e saída. O back-end em Power Query, linguagem M, tem nove consultas e 556 linhas e calcula todas as coordenadas. O front-end em Deneb, com Vega, só desenha e cuida da interação. Separar as camadas permitiu desenvolver e depurar cada uma isoladamente. Nenhuma coordenada é desenhada à mão.</a:t>
+              <a:t>[~50 s] Em vez de usar um visual pronto, construímos um motor em duas camadas. A entrada são duas abas de Excel: Fuels, com combustível, estágio e cor; e Techs, com tecnologia, entrada e saída. A camada de cálculo, em Power Query, na linguagem M, tem nove consultas e 556 linhas e calcula todas as coordenadas. A camada de desenho, no Deneb, só desenha e cuida da interação. Separar as camadas permitiu desenvolver e depurar cada uma isoladamente. Nenhuma coordenada é desenhada à mão.</a:t>
             </a:r>
           </a:p>
         </p:txBody>
@@ -1284,7 +1284,7 @@
           <a:lstStyle/>
           <a:p>
             <a:r>
-              <a:t>[~60 s] Este é o principal resultado técnico. Uma conexão longa, por exemplo de um combustível do estágio 1 até uma demanda do estágio 5, passa por cima de caixas de outras tecnologias, como em (a). Desviar a linha exigiria busca em grade, inviável em M, que não tem estado mutável nem laços. A solução foi reservar espaço antes de desenhar: cada coluna ocupada que a conexão cruza recebe um nó fantasma invisível, que conta na densidade da raia, como em (b). A raia passa a reservar mais linhas, e em (c) a conexão percorre uma linha livre. Tudo é feito com agrupamentos, somas acumuladas e junções de tabela. A troca é deliberada: o diagrama fica um pouco mais alto, mas o algoritmo é determinístico.</a:t>
+              <a:t>[~60 s] Este é o principal resultado técnico. Cada faixa horizontal do diagrama é uma raia. Uma conexão longa, por exemplo de um combustível do estágio 1 até uma demanda do estágio 5, passa por cima de caixas de outras tecnologias, como em (a). Desviar a linha exigiria busca em grade, inviável na linguagem M, que não tem estado mutável nem laços. A solução foi reservar espaço antes de desenhar: cada coluna ocupada que a conexão cruza recebe um nó fantasma, invisível, que conta na densidade da raia, como em (b). A raia passa a reservar mais linhas, e em (c) a conexão percorre uma linha livre. Tudo é feito com agrupamentos, somas acumuladas e junções de tabela. A troca é deliberada: o diagrama fica um pouco mais alto, mas o algoritmo é determinístico.</a:t>
             </a:r>
           </a:p>
         </p:txBody>
@@ -1342,7 +1342,7 @@
           <a:lstStyle/>
           <a:p>
             <a:r>
-              <a:t>[~35 s] Um caso que os visuais de mercado rejeitam é o fluxo reverso: a termelétrica a gás consome gás processado, do estágio 3, e gera eletricidade, que está no estágio 2. O back-end detecta isso comparando os estágios de entrada e saída, sem o usuário declarar nada, e o Vega desenha uma rota em ponte por cima das caixas. No sistema de validação há quatro casos, todos roteados automaticamente.</a:t>
+              <a:t>[~45 s] Um caso que os visuais prontos não tratam é a conexão de retorno. A termelétrica a gás natural usa gás processado, que está no estágio 3, para gerar eletricidade, que está no estágio 2. Isso não é erro do modelo: a energia segue o sentido normal, do gás para a eletricidade. Mas, como as colunas seguem o estágio, a entrada fica à direita da saída, e a linha precisa voltar para a esquerda, contornando as caixas. O cálculo detecta esses casos comparando os estágios de entrada e saída, sem o usuário declarar nada. No sistema de validação há quatro casos, todos desenhados automaticamente.</a:t>
             </a:r>
           </a:p>
         </p:txBody>
@@ -1400,7 +1400,7 @@
           <a:lstStyle/>
           <a:p>
             <a:r>
-              <a:t>[~50 s] O diagrama deixou de ser imagem e virou interface. No estado íntegro, tudo aparece em opacidade plena. Ao clicar em BIO, acende todo o grupo de cor: BIO e CAN compartilham a cor no cadastro, então as demandas de biomassa, a usina PWRBIO e a rota de etanol PROETA1 acendem juntas. A cor expressa a classe do vetor energético. Ao clicar em COA, que tem cor exclusiva, só a cadeia do carvão fica em destaque, e a da biomassa continua visível ao fundo, atenuada. Cada linha tem 2 pixels, mas a área de clique invisível tem 45 pixels, o que torna o clique viável num diagrama denso.</a:t>
+              <a:t>[~45 s] O diagrama deixou de ser imagem e virou interface. Sem nenhuma seleção, todas as cadeias aparecem iguais. Ao clicar em um combustível ou tecnologia, as demais cadeias ficam esmaecidas, mas continuam visíveis como contexto. À esquerda, cliquei na biomassa: biomassa e cana-de-açúcar compartilham a cor no cadastro, então o grupo inteiro é destacado, incluindo as demandas de biomassa, a usina a biomassa e a rota de etanol. A cor expressa a classe do vetor energético. À direita, cliquei no carvão, que tem cor exclusiva: só a cadeia do carvão fica em destaque. Cada linha tem 2 pixels, mas a área de clique invisível tem 45 pixels, o que torna o clique viável num diagrama denso.</a:t>
             </a:r>
           </a:p>
         </p:txBody>
@@ -11804,7 +11804,7 @@
                   <a:srgbClr val="0B5394"/>
                 </a:solidFill>
               </a:rPr>
-              <a:t>Validação em sistema nacional estilizado</a:t>
+              <a:t>Validação com a estrutura do sistema energético brasileiro</a:t>
             </a:r>
           </a:p>
         </p:txBody>
@@ -11854,9 +11854,117 @@
           </a:p>
         </p:txBody>
       </p:sp>
+      <p:sp>
+        <p:nvSpPr>
+          <p:cNvPr id="49" name="Google Shape;49;p8"/>
+          <p:cNvSpPr txBox="1"/>
+          <p:nvPr>
+            <p:ph idx="12" type="sldNum"/>
+          </p:nvPr>
+        </p:nvSpPr>
+        <p:spPr>
+          <a:xfrm>
+            <a:off x="8610600" y="6356350"/>
+            <a:ext cx="2743200" cy="365125"/>
+          </a:xfrm>
+          <a:prstGeom prst="rect">
+            <a:avLst/>
+          </a:prstGeom>
+          <a:noFill/>
+          <a:ln>
+            <a:noFill/>
+          </a:ln>
+        </p:spPr>
+        <p:txBody>
+          <a:bodyPr anchorCtr="0" anchor="ctr" bIns="45700" lIns="91425" spcFirstLastPara="1" rIns="91425" wrap="square" tIns="45700">
+            <a:noAutofit/>
+          </a:bodyPr>
+          <a:lstStyle>
+            <a:lvl1pPr indent="0" lvl="0" marL="0" algn="r">
+              <a:spcBef>
+                <a:spcPts val="0"/>
+              </a:spcBef>
+              <a:buNone/>
+              <a:defRPr/>
+            </a:lvl1pPr>
+            <a:lvl2pPr indent="0" lvl="1" marL="0" algn="r">
+              <a:spcBef>
+                <a:spcPts val="0"/>
+              </a:spcBef>
+              <a:buNone/>
+              <a:defRPr/>
+            </a:lvl2pPr>
+            <a:lvl3pPr indent="0" lvl="2" marL="0" algn="r">
+              <a:spcBef>
+                <a:spcPts val="0"/>
+              </a:spcBef>
+              <a:buNone/>
+              <a:defRPr/>
+            </a:lvl3pPr>
+            <a:lvl4pPr indent="0" lvl="3" marL="0" algn="r">
+              <a:spcBef>
+                <a:spcPts val="0"/>
+              </a:spcBef>
+              <a:buNone/>
+              <a:defRPr/>
+            </a:lvl4pPr>
+            <a:lvl5pPr indent="0" lvl="4" marL="0" algn="r">
+              <a:spcBef>
+                <a:spcPts val="0"/>
+              </a:spcBef>
+              <a:buNone/>
+              <a:defRPr/>
+            </a:lvl5pPr>
+            <a:lvl6pPr indent="0" lvl="5" marL="0" algn="r">
+              <a:spcBef>
+                <a:spcPts val="0"/>
+              </a:spcBef>
+              <a:buNone/>
+              <a:defRPr/>
+            </a:lvl6pPr>
+            <a:lvl7pPr indent="0" lvl="6" marL="0" algn="r">
+              <a:spcBef>
+                <a:spcPts val="0"/>
+              </a:spcBef>
+              <a:buNone/>
+              <a:defRPr/>
+            </a:lvl7pPr>
+            <a:lvl8pPr indent="0" lvl="7" marL="0" algn="r">
+              <a:spcBef>
+                <a:spcPts val="0"/>
+              </a:spcBef>
+              <a:buNone/>
+              <a:defRPr/>
+            </a:lvl8pPr>
+            <a:lvl9pPr indent="0" lvl="8" marL="0" algn="r">
+              <a:spcBef>
+                <a:spcPts val="0"/>
+              </a:spcBef>
+              <a:buNone/>
+              <a:defRPr/>
+            </a:lvl9pPr>
+          </a:lstStyle>
+          <a:p>
+            <a:pPr indent="0" lvl="0" marL="0" rtl="0" algn="r">
+              <a:spcBef>
+                <a:spcPts val="0"/>
+              </a:spcBef>
+              <a:spcAft>
+                <a:spcPts val="0"/>
+              </a:spcAft>
+              <a:buNone/>
+            </a:pPr>
+            <a:fld id="{00000000-1234-1234-1234-123412341234}" type="slidenum">
+              <a:rPr lang="pt-BR"/>
+              <a:t>‹#›</a:t>
+            </a:fld>
+            <a:endParaRPr/>
+          </a:p>
+        </p:txBody>
+      </p:sp>
       <p:pic>
         <p:nvPicPr>
-          <p:cNvPr id="4" name="Panorama" descr="Figura7.png"/>
+          <p:cNvPr id="50" name="Detalhe" descr="panorama_zoom.png"/>
           <p:cNvPicPr>
             <a:picLocks noChangeAspect="1"/>
           </p:cNvPicPr>
@@ -11871,7 +11979,7 @@
         <p:spPr>
           <a:xfrm>
             <a:off x="914400" y="1783080"/>
-            <a:ext cx="6684062" cy="4069080"/>
+            <a:ext cx="5120640" cy="4114800"/>
           </a:xfrm>
           <a:prstGeom prst="rect">
             <a:avLst/>
@@ -11885,14 +11993,14 @@
       </p:pic>
       <p:sp>
         <p:nvSpPr>
-          <p:cNvPr id="5" name="TextBox 4"/>
+          <p:cNvPr id="51" name="TextBox 50"/>
           <p:cNvSpPr txBox="1"/>
           <p:nvPr/>
         </p:nvSpPr>
         <p:spPr>
           <a:xfrm>
-            <a:off x="914400" y="5907024"/>
-            <a:ext cx="6684062" cy="274320"/>
+            <a:off x="914400" y="5952744"/>
+            <a:ext cx="5120640" cy="274320"/>
           </a:xfrm>
           <a:prstGeom prst="rect">
             <a:avLst/>
@@ -11923,21 +12031,21 @@
                 </a:solidFill>
                 <a:latin typeface="Calibri"/>
               </a:rPr>
-              <a:t>Recorte do diagrama gerado automaticamente</a:t>
+              <a:t>Detalhe do diagrama gerado automaticamente</a:t>
             </a:r>
           </a:p>
         </p:txBody>
       </p:sp>
       <p:sp>
         <p:nvSpPr>
-          <p:cNvPr id="6" name="Stat combustíveis"/>
+          <p:cNvPr id="52" name="Stat combustíveis"/>
           <p:cNvSpPr/>
           <p:nvPr/>
         </p:nvSpPr>
         <p:spPr>
           <a:xfrm>
-            <a:off x="7964222" y="1783080"/>
-            <a:ext cx="1563724" cy="868680"/>
+            <a:off x="6400800" y="1783080"/>
+            <a:ext cx="1533144" cy="1051560"/>
           </a:xfrm>
           <a:prstGeom prst="roundRect">
             <a:avLst>
@@ -11952,7 +12060,7 @@
           </a:ln>
         </p:spPr>
         <p:txBody>
-          <a:bodyPr rtlCol="0" anchor="ctr" wrap="square" lIns="27432" rIns="27432" tIns="27432" bIns="27432"/>
+          <a:bodyPr rtlCol="0" anchor="ctr" wrap="square" lIns="36576" rIns="36576" tIns="36576" bIns="36576"/>
           <a:lstStyle/>
           <a:p>
             <a:pPr algn="ctr">
@@ -12002,14 +12110,14 @@
       </p:sp>
       <p:sp>
         <p:nvSpPr>
-          <p:cNvPr id="7" name="Stat estágios"/>
+          <p:cNvPr id="53" name="Stat estágios"/>
           <p:cNvSpPr/>
           <p:nvPr/>
         </p:nvSpPr>
         <p:spPr>
           <a:xfrm>
-            <a:off x="9710827" y="1783080"/>
-            <a:ext cx="1563724" cy="868680"/>
+            <a:off x="8071104" y="1783080"/>
+            <a:ext cx="1533144" cy="1051560"/>
           </a:xfrm>
           <a:prstGeom prst="roundRect">
             <a:avLst>
@@ -12024,7 +12132,7 @@
           </a:ln>
         </p:spPr>
         <p:txBody>
-          <a:bodyPr rtlCol="0" anchor="ctr" wrap="square" lIns="27432" rIns="27432" tIns="27432" bIns="27432"/>
+          <a:bodyPr rtlCol="0" anchor="ctr" wrap="square" lIns="36576" rIns="36576" tIns="36576" bIns="36576"/>
           <a:lstStyle/>
           <a:p>
             <a:pPr algn="ctr">
@@ -12074,14 +12182,14 @@
       </p:sp>
       <p:sp>
         <p:nvSpPr>
-          <p:cNvPr id="8" name="Stat tecnologias"/>
+          <p:cNvPr id="54" name="Stat tecnologias"/>
           <p:cNvSpPr/>
           <p:nvPr/>
         </p:nvSpPr>
         <p:spPr>
           <a:xfrm>
-            <a:off x="7964222" y="2788920"/>
-            <a:ext cx="1563724" cy="868680"/>
+            <a:off x="9741408" y="1783080"/>
+            <a:ext cx="1533144" cy="1051560"/>
           </a:xfrm>
           <a:prstGeom prst="roundRect">
             <a:avLst>
@@ -12096,7 +12204,7 @@
           </a:ln>
         </p:spPr>
         <p:txBody>
-          <a:bodyPr rtlCol="0" anchor="ctr" wrap="square" lIns="27432" rIns="27432" tIns="27432" bIns="27432"/>
+          <a:bodyPr rtlCol="0" anchor="ctr" wrap="square" lIns="36576" rIns="36576" tIns="36576" bIns="36576"/>
           <a:lstStyle/>
           <a:p>
             <a:pPr algn="ctr">
@@ -12146,14 +12254,14 @@
       </p:sp>
       <p:sp>
         <p:nvSpPr>
-          <p:cNvPr id="9" name="Stat ligações declaradas"/>
+          <p:cNvPr id="55" name="Stat ligações declaradas"/>
           <p:cNvSpPr/>
           <p:nvPr/>
         </p:nvSpPr>
         <p:spPr>
           <a:xfrm>
-            <a:off x="9710827" y="2788920"/>
-            <a:ext cx="1563724" cy="868680"/>
+            <a:off x="6400800" y="2971800"/>
+            <a:ext cx="1533144" cy="1051560"/>
           </a:xfrm>
           <a:prstGeom prst="roundRect">
             <a:avLst>
@@ -12168,7 +12276,7 @@
           </a:ln>
         </p:spPr>
         <p:txBody>
-          <a:bodyPr rtlCol="0" anchor="ctr" wrap="square" lIns="27432" rIns="27432" tIns="27432" bIns="27432"/>
+          <a:bodyPr rtlCol="0" anchor="ctr" wrap="square" lIns="36576" rIns="36576" tIns="36576" bIns="36576"/>
           <a:lstStyle/>
           <a:p>
             <a:pPr algn="ctr">
@@ -12218,14 +12326,14 @@
       </p:sp>
       <p:sp>
         <p:nvSpPr>
-          <p:cNvPr id="10" name="Stat fluxos reversos"/>
+          <p:cNvPr id="56" name="Stat conexões de retorno"/>
           <p:cNvSpPr/>
           <p:nvPr/>
         </p:nvSpPr>
         <p:spPr>
           <a:xfrm>
-            <a:off x="7964222" y="3794759"/>
-            <a:ext cx="1563724" cy="868680"/>
+            <a:off x="8071104" y="2971800"/>
+            <a:ext cx="1533144" cy="1051560"/>
           </a:xfrm>
           <a:prstGeom prst="roundRect">
             <a:avLst>
@@ -12240,7 +12348,7 @@
           </a:ln>
         </p:spPr>
         <p:txBody>
-          <a:bodyPr rtlCol="0" anchor="ctr" wrap="square" lIns="27432" rIns="27432" tIns="27432" bIns="27432"/>
+          <a:bodyPr rtlCol="0" anchor="ctr" wrap="square" lIns="36576" rIns="36576" tIns="36576" bIns="36576"/>
           <a:lstStyle/>
           <a:p>
             <a:pPr algn="ctr">
@@ -12283,21 +12391,21 @@
                 </a:solidFill>
                 <a:latin typeface="Calibri"/>
               </a:rPr>
-              <a:t>fluxos reversos</a:t>
+              <a:t>conexões de retorno</a:t>
             </a:r>
           </a:p>
         </p:txBody>
       </p:sp>
       <p:sp>
         <p:nvSpPr>
-          <p:cNvPr id="11" name="Stat coordenadas à mão"/>
+          <p:cNvPr id="57" name="Stat coordenadas à mão"/>
           <p:cNvSpPr/>
           <p:nvPr/>
         </p:nvSpPr>
         <p:spPr>
           <a:xfrm>
-            <a:off x="9710827" y="3794759"/>
-            <a:ext cx="1563724" cy="868680"/>
+            <a:off x="9741408" y="2971800"/>
+            <a:ext cx="1533144" cy="1051560"/>
           </a:xfrm>
           <a:prstGeom prst="roundRect">
             <a:avLst>
@@ -12312,7 +12420,7 @@
           </a:ln>
         </p:spPr>
         <p:txBody>
-          <a:bodyPr rtlCol="0" anchor="ctr" wrap="square" lIns="27432" rIns="27432" tIns="27432" bIns="27432"/>
+          <a:bodyPr rtlCol="0" anchor="ctr" wrap="square" lIns="36576" rIns="36576" tIns="36576" bIns="36576"/>
           <a:lstStyle/>
           <a:p>
             <a:pPr algn="ctr">
@@ -12362,14 +12470,59 @@
       </p:sp>
       <p:sp>
         <p:nvSpPr>
-          <p:cNvPr id="12" name="Ganho"/>
+          <p:cNvPr id="58" name="TextBox 57"/>
+          <p:cNvSpPr txBox="1"/>
+          <p:nvPr/>
+        </p:nvSpPr>
+        <p:spPr>
+          <a:xfrm>
+            <a:off x="6400800" y="4206240"/>
+            <a:ext cx="4873752" cy="685800"/>
+          </a:xfrm>
+          <a:prstGeom prst="rect">
+            <a:avLst/>
+          </a:prstGeom>
+          <a:noFill/>
+        </p:spPr>
+        <p:txBody>
+          <a:bodyPr wrap="square" anchor="t" lIns="0" rIns="0" tIns="0" bIns="0">
+            <a:spAutoFit/>
+          </a:bodyPr>
+          <a:lstStyle/>
+          <a:p>
+            <a:pPr algn="l">
+              <a:lnSpc>
+                <a:spcPct val="100000"/>
+              </a:lnSpc>
+              <a:spcBef>
+                <a:spcPts val="0"/>
+              </a:spcBef>
+              <a:spcAft>
+                <a:spcPts val="0"/>
+              </a:spcAft>
+            </a:pPr>
+            <a:r>
+              <a:rPr sz="1300" b="0" i="0">
+                <a:solidFill>
+                  <a:srgbClr val="595959"/>
+                </a:solidFill>
+                <a:latin typeface="Calibri"/>
+              </a:rPr>
+              <a:t>Estrutura do sistema: quais combustíveis e tecnologias existem e como se ligam, sem quantidades de energia.</a:t>
+            </a:r>
+          </a:p>
+        </p:txBody>
+      </p:sp>
+      <p:sp>
+        <p:nvSpPr>
+          <p:cNvPr id="59" name="Ganho"/>
           <p:cNvSpPr/>
           <p:nvPr/>
         </p:nvSpPr>
         <p:spPr>
           <a:xfrm>
-            <a:off x="7964222" y="4846320"/>
-            <a:ext cx="3310329" cy="1005840"/>
+            <a:off x="6400800" y="4846320"/>
+            <a:ext cx="4873752" cy="1051560"/>
           </a:xfrm>
           <a:prstGeom prst="roundRect">
             <a:avLst>
@@ -12489,7 +12642,7 @@
                   <a:srgbClr val="0B5394"/>
                 </a:solidFill>
               </a:rPr>
-              <a:t>Conclusões e trabalhos futuros</a:t>
+              <a:t>Conclusões</a:t>
             </a:r>
           </a:p>
         </p:txBody>
@@ -12541,7 +12694,115 @@
       </p:sp>
       <p:sp>
         <p:nvSpPr>
-          <p:cNvPr id="4" name="Oval 3"/>
+          <p:cNvPr id="49" name="Google Shape;49;p8"/>
+          <p:cNvSpPr txBox="1"/>
+          <p:nvPr>
+            <p:ph idx="12" type="sldNum"/>
+          </p:nvPr>
+        </p:nvSpPr>
+        <p:spPr>
+          <a:xfrm>
+            <a:off x="8610600" y="6356350"/>
+            <a:ext cx="2743200" cy="365125"/>
+          </a:xfrm>
+          <a:prstGeom prst="rect">
+            <a:avLst/>
+          </a:prstGeom>
+          <a:noFill/>
+          <a:ln>
+            <a:noFill/>
+          </a:ln>
+        </p:spPr>
+        <p:txBody>
+          <a:bodyPr anchorCtr="0" anchor="ctr" bIns="45700" lIns="91425" spcFirstLastPara="1" rIns="91425" wrap="square" tIns="45700">
+            <a:noAutofit/>
+          </a:bodyPr>
+          <a:lstStyle>
+            <a:lvl1pPr indent="0" lvl="0" marL="0" algn="r">
+              <a:spcBef>
+                <a:spcPts val="0"/>
+              </a:spcBef>
+              <a:buNone/>
+              <a:defRPr/>
+            </a:lvl1pPr>
+            <a:lvl2pPr indent="0" lvl="1" marL="0" algn="r">
+              <a:spcBef>
+                <a:spcPts val="0"/>
+              </a:spcBef>
+              <a:buNone/>
+              <a:defRPr/>
+            </a:lvl2pPr>
+            <a:lvl3pPr indent="0" lvl="2" marL="0" algn="r">
+              <a:spcBef>
+                <a:spcPts val="0"/>
+              </a:spcBef>
+              <a:buNone/>
+              <a:defRPr/>
+            </a:lvl3pPr>
+            <a:lvl4pPr indent="0" lvl="3" marL="0" algn="r">
+              <a:spcBef>
+                <a:spcPts val="0"/>
+              </a:spcBef>
+              <a:buNone/>
+              <a:defRPr/>
+            </a:lvl4pPr>
+            <a:lvl5pPr indent="0" lvl="4" marL="0" algn="r">
+              <a:spcBef>
+                <a:spcPts val="0"/>
+              </a:spcBef>
+              <a:buNone/>
+              <a:defRPr/>
+            </a:lvl5pPr>
+            <a:lvl6pPr indent="0" lvl="5" marL="0" algn="r">
+              <a:spcBef>
+                <a:spcPts val="0"/>
+              </a:spcBef>
+              <a:buNone/>
+              <a:defRPr/>
+            </a:lvl6pPr>
+            <a:lvl7pPr indent="0" lvl="6" marL="0" algn="r">
+              <a:spcBef>
+                <a:spcPts val="0"/>
+              </a:spcBef>
+              <a:buNone/>
+              <a:defRPr/>
+            </a:lvl7pPr>
+            <a:lvl8pPr indent="0" lvl="7" marL="0" algn="r">
+              <a:spcBef>
+                <a:spcPts val="0"/>
+              </a:spcBef>
+              <a:buNone/>
+              <a:defRPr/>
+            </a:lvl8pPr>
+            <a:lvl9pPr indent="0" lvl="8" marL="0" algn="r">
+              <a:spcBef>
+                <a:spcPts val="0"/>
+              </a:spcBef>
+              <a:buNone/>
+              <a:defRPr/>
+            </a:lvl9pPr>
+          </a:lstStyle>
+          <a:p>
+            <a:pPr indent="0" lvl="0" marL="0" rtl="0" algn="r">
+              <a:spcBef>
+                <a:spcPts val="0"/>
+              </a:spcBef>
+              <a:spcAft>
+                <a:spcPts val="0"/>
+              </a:spcAft>
+              <a:buNone/>
+            </a:pPr>
+            <a:fld id="{00000000-1234-1234-1234-123412341234}" type="slidenum">
+              <a:rPr lang="pt-BR"/>
+              <a:t>‹#›</a:t>
+            </a:fld>
+            <a:endParaRPr/>
+          </a:p>
+        </p:txBody>
+      </p:sp>
+      <p:sp>
+        <p:nvSpPr>
+          <p:cNvPr id="50" name="Oval 49"/>
           <p:cNvSpPr/>
           <p:nvPr/>
         </p:nvSpPr>
@@ -12589,7 +12850,7 @@
       </p:sp>
       <p:sp>
         <p:nvSpPr>
-          <p:cNvPr id="5" name="TextBox 4"/>
+          <p:cNvPr id="51" name="TextBox 50"/>
           <p:cNvSpPr txBox="1"/>
           <p:nvPr/>
         </p:nvSpPr>
@@ -12649,14 +12910,14 @@
                 </a:solidFill>
                 <a:latin typeface="Calibri"/>
               </a:rPr>
-              <a:t>Gera o RES completo e interativo a partir de duas tabelas, funcional e documentada</a:t>
+              <a:t>Gera o diagrama completo e interativo a partir de duas tabelas, funcional e documentada</a:t>
             </a:r>
           </a:p>
         </p:txBody>
       </p:sp>
       <p:sp>
         <p:nvSpPr>
-          <p:cNvPr id="6" name="Oval 5"/>
+          <p:cNvPr id="52" name="Oval 51"/>
           <p:cNvSpPr/>
           <p:nvPr/>
         </p:nvSpPr>
@@ -12704,7 +12965,7 @@
       </p:sp>
       <p:sp>
         <p:nvSpPr>
-          <p:cNvPr id="7" name="TextBox 6"/>
+          <p:cNvPr id="53" name="TextBox 52"/>
           <p:cNvSpPr txBox="1"/>
           <p:nvPr/>
         </p:nvSpPr>
@@ -12742,7 +13003,7 @@
                 </a:solidFill>
                 <a:latin typeface="Calibri"/>
               </a:rPr>
-              <a:t>Manutenção a custo quase zero</a:t>
+              <a:t>Atualização automática do diagrama</a:t>
             </a:r>
           </a:p>
           <a:p>
@@ -12771,7 +13032,7 @@
       </p:sp>
       <p:sp>
         <p:nvSpPr>
-          <p:cNvPr id="8" name="Oval 7"/>
+          <p:cNvPr id="54" name="Oval 53"/>
           <p:cNvSpPr/>
           <p:nvPr/>
         </p:nvSpPr>
@@ -12819,7 +13080,7 @@
       </p:sp>
       <p:sp>
         <p:nvSpPr>
-          <p:cNvPr id="9" name="TextBox 8"/>
+          <p:cNvPr id="55" name="TextBox 54"/>
           <p:cNvSpPr txBox="1"/>
           <p:nvPr/>
         </p:nvSpPr>
@@ -12879,14 +13140,14 @@
                 </a:solidFill>
                 <a:latin typeface="Calibri"/>
               </a:rPr>
-              <a:t>Nós fantasmas: layout sem sobreposição só com transformações de tabela</a:t>
+              <a:t>“Nós fantasmas”: disposição sem sobreposição apenas com transformações de tabela</a:t>
             </a:r>
           </a:p>
         </p:txBody>
       </p:sp>
       <p:sp>
         <p:nvSpPr>
-          <p:cNvPr id="10" name="Oval 9"/>
+          <p:cNvPr id="56" name="Oval 55"/>
           <p:cNvSpPr/>
           <p:nvPr/>
         </p:nvSpPr>
@@ -12934,7 +13195,7 @@
       </p:sp>
       <p:sp>
         <p:nvSpPr>
-          <p:cNvPr id="11" name="TextBox 10"/>
+          <p:cNvPr id="57" name="TextBox 56"/>
           <p:cNvSpPr txBox="1"/>
           <p:nvPr/>
         </p:nvSpPr>
@@ -12972,7 +13233,7 @@
                 </a:solidFill>
                 <a:latin typeface="Calibri"/>
               </a:rPr>
-              <a:t>Método genérico</a:t>
+              <a:t>Método de aplicação geral</a:t>
             </a:r>
           </a:p>
           <a:p>
@@ -13001,7 +13262,7 @@
       </p:sp>
       <p:sp>
         <p:nvSpPr>
-          <p:cNvPr id="12" name="Trabalhos futuros"/>
+          <p:cNvPr id="58" name="Trabalhos futuros"/>
           <p:cNvSpPr/>
           <p:nvPr/>
         </p:nvSpPr>
@@ -13071,7 +13332,7 @@
                 </a:solidFill>
                 <a:latin typeface="Calibri"/>
               </a:rPr>
-              <a:t>Parametrizar as constantes de layout na interface</a:t>
+              <a:t>Parametrizar as constantes de disposição na interface</a:t>
             </a:r>
           </a:p>
           <a:p>
@@ -13153,6 +13414,51 @@
                 <a:latin typeface="Calibri"/>
               </a:rPr>
               <a:t>Diagnósticos automáticos de consistência do modelo</a:t>
+            </a:r>
+          </a:p>
+          <a:p>
+            <a:pPr algn="l">
+              <a:lnSpc>
+                <a:spcPct val="100000"/>
+              </a:lnSpc>
+              <a:spcBef>
+                <a:spcPts val="2200"/>
+              </a:spcBef>
+              <a:spcAft>
+                <a:spcPts val="0"/>
+              </a:spcAft>
+            </a:pPr>
+            <a:r>
+              <a:rPr sz="1300" b="1" i="0">
+                <a:solidFill>
+                  <a:srgbClr val="595959"/>
+                </a:solidFill>
+                <a:latin typeface="Calibri"/>
+              </a:rPr>
+              <a:t>Código-fonte</a:t>
+            </a:r>
+          </a:p>
+          <a:p>
+            <a:pPr algn="l">
+              <a:lnSpc>
+                <a:spcPct val="100000"/>
+              </a:lnSpc>
+              <a:spcBef>
+                <a:spcPts val="0"/>
+              </a:spcBef>
+              <a:spcAft>
+                <a:spcPts val="0"/>
+              </a:spcAft>
+            </a:pPr>
+            <a:r>
+              <a:rPr sz="1300" b="0" i="0">
+                <a:solidFill>
+                  <a:srgbClr val="0B5394"/>
+                </a:solidFill>
+                <a:latin typeface="Calibri"/>
+                <a:hlinkClick r:id="rId3"/>
+              </a:rPr>
+              <a:t>github.com/Freddieij/Power_BI_Borba</a:t>
             </a:r>
           </a:p>
         </p:txBody>
@@ -13368,7 +13674,7 @@
                 <a:cs typeface="Arial"/>
                 <a:sym typeface="Arial"/>
               </a:rPr>
-              <a:t>Apoio: CNPq · PIBITI/PIBINOVA UFF 2025-2026</a:t>
+              <a:t>github.com/Freddieij/Power_BI_Borba  ·  Apoio: CNPq (PIBITI/PIBINOVA UFF 2025-2026)</a:t>
             </a:r>
             <a:endParaRPr sz="2400"/>
           </a:p>
@@ -13603,7 +13909,115 @@
       </p:sp>
       <p:sp>
         <p:nvSpPr>
-          <p:cNvPr id="4" name="Proposta"/>
+          <p:cNvPr id="49" name="Google Shape;49;p8"/>
+          <p:cNvSpPr txBox="1"/>
+          <p:nvPr>
+            <p:ph idx="12" type="sldNum"/>
+          </p:nvPr>
+        </p:nvSpPr>
+        <p:spPr>
+          <a:xfrm>
+            <a:off x="8610600" y="6356350"/>
+            <a:ext cx="2743200" cy="365125"/>
+          </a:xfrm>
+          <a:prstGeom prst="rect">
+            <a:avLst/>
+          </a:prstGeom>
+          <a:noFill/>
+          <a:ln>
+            <a:noFill/>
+          </a:ln>
+        </p:spPr>
+        <p:txBody>
+          <a:bodyPr anchorCtr="0" anchor="ctr" bIns="45700" lIns="91425" spcFirstLastPara="1" rIns="91425" wrap="square" tIns="45700">
+            <a:noAutofit/>
+          </a:bodyPr>
+          <a:lstStyle>
+            <a:lvl1pPr indent="0" lvl="0" marL="0" algn="r">
+              <a:spcBef>
+                <a:spcPts val="0"/>
+              </a:spcBef>
+              <a:buNone/>
+              <a:defRPr/>
+            </a:lvl1pPr>
+            <a:lvl2pPr indent="0" lvl="1" marL="0" algn="r">
+              <a:spcBef>
+                <a:spcPts val="0"/>
+              </a:spcBef>
+              <a:buNone/>
+              <a:defRPr/>
+            </a:lvl2pPr>
+            <a:lvl3pPr indent="0" lvl="2" marL="0" algn="r">
+              <a:spcBef>
+                <a:spcPts val="0"/>
+              </a:spcBef>
+              <a:buNone/>
+              <a:defRPr/>
+            </a:lvl3pPr>
+            <a:lvl4pPr indent="0" lvl="3" marL="0" algn="r">
+              <a:spcBef>
+                <a:spcPts val="0"/>
+              </a:spcBef>
+              <a:buNone/>
+              <a:defRPr/>
+            </a:lvl4pPr>
+            <a:lvl5pPr indent="0" lvl="4" marL="0" algn="r">
+              <a:spcBef>
+                <a:spcPts val="0"/>
+              </a:spcBef>
+              <a:buNone/>
+              <a:defRPr/>
+            </a:lvl5pPr>
+            <a:lvl6pPr indent="0" lvl="5" marL="0" algn="r">
+              <a:spcBef>
+                <a:spcPts val="0"/>
+              </a:spcBef>
+              <a:buNone/>
+              <a:defRPr/>
+            </a:lvl6pPr>
+            <a:lvl7pPr indent="0" lvl="6" marL="0" algn="r">
+              <a:spcBef>
+                <a:spcPts val="0"/>
+              </a:spcBef>
+              <a:buNone/>
+              <a:defRPr/>
+            </a:lvl7pPr>
+            <a:lvl8pPr indent="0" lvl="7" marL="0" algn="r">
+              <a:spcBef>
+                <a:spcPts val="0"/>
+              </a:spcBef>
+              <a:buNone/>
+              <a:defRPr/>
+            </a:lvl8pPr>
+            <a:lvl9pPr indent="0" lvl="8" marL="0" algn="r">
+              <a:spcBef>
+                <a:spcPts val="0"/>
+              </a:spcBef>
+              <a:buNone/>
+              <a:defRPr/>
+            </a:lvl9pPr>
+          </a:lstStyle>
+          <a:p>
+            <a:pPr indent="0" lvl="0" marL="0" rtl="0" algn="r">
+              <a:spcBef>
+                <a:spcPts val="0"/>
+              </a:spcBef>
+              <a:spcAft>
+                <a:spcPts val="0"/>
+              </a:spcAft>
+              <a:buNone/>
+            </a:pPr>
+            <a:fld id="{00000000-1234-1234-1234-123412341234}" type="slidenum">
+              <a:rPr lang="pt-BR"/>
+              <a:t>‹#›</a:t>
+            </a:fld>
+            <a:endParaRPr/>
+          </a:p>
+        </p:txBody>
+      </p:sp>
+      <p:sp>
+        <p:nvSpPr>
+          <p:cNvPr id="50" name="Proposta"/>
           <p:cNvSpPr/>
           <p:nvPr/>
         </p:nvSpPr>
@@ -13668,7 +14082,7 @@
                 </a:solidFill>
                 <a:latin typeface="Calibri"/>
               </a:rPr>
-              <a:t>Computação paralela aplicada à simulação estocástica de redes elétricas com REDs</a:t>
+              <a:t>Computação paralela aplicada à simulação estocástica de redes elétricas com recursos energéticos distribuídos</a:t>
             </a:r>
           </a:p>
           <a:p>
@@ -13697,7 +14111,7 @@
       </p:sp>
       <p:sp>
         <p:nvSpPr>
-          <p:cNvPr id="5" name="Right Arrow 4"/>
+          <p:cNvPr id="51" name="Right Arrow 50"/>
           <p:cNvSpPr/>
           <p:nvPr/>
         </p:nvSpPr>
@@ -13726,7 +14140,7 @@
       </p:sp>
       <p:sp>
         <p:nvSpPr>
-          <p:cNvPr id="6" name="TextBox 5"/>
+          <p:cNvPr id="52" name="TextBox 51"/>
           <p:cNvSpPr txBox="1"/>
           <p:nvPr/>
         </p:nvSpPr>
@@ -13771,7 +14185,7 @@
       </p:sp>
       <p:sp>
         <p:nvSpPr>
-          <p:cNvPr id="7" name="PeD"/>
+          <p:cNvPr id="53" name="PeD"/>
           <p:cNvSpPr/>
           <p:nvPr/>
         </p:nvSpPr>
@@ -13814,7 +14228,7 @@
                 </a:solidFill>
                 <a:latin typeface="Calibri"/>
               </a:rPr>
-              <a:t>PROJETO DE P&amp;D (VEÍCULOS ELÉTRICOS)</a:t>
+              <a:t>PROJETO DE PESQUISA E DESENVOLVIMENTO (P&amp;D)</a:t>
             </a:r>
           </a:p>
           <a:p>
@@ -13858,14 +14272,14 @@
                 </a:solidFill>
                 <a:latin typeface="Calibri"/>
               </a:rPr>
-              <a:t>Planejamento energético do SEP, REDs e VEs, com modelagem no OSeMOSYS. Atuação junto ao Prof. Bruno Borba.</a:t>
+              <a:t>Planejamento energético com a ferramenta OSeMOSYS. Atuação junto ao Prof. Bruno Borba.</a:t>
             </a:r>
           </a:p>
         </p:txBody>
       </p:sp>
       <p:sp>
         <p:nvSpPr>
-          <p:cNvPr id="8" name="Motivo"/>
+          <p:cNvPr id="54" name="Motivo"/>
           <p:cNvSpPr/>
           <p:nvPr/>
         </p:nvSpPr>
@@ -13917,7 +14331,7 @@
                 </a:solidFill>
                 <a:latin typeface="Calibri"/>
               </a:rPr>
-              <a:t>alta demanda de trabalho do P&amp;D, em tema ligado à proposta original. Este trabalho automatiza um instrumento do planejamento: o diagrama RES.</a:t>
+              <a:t>alta demanda de trabalho do P&amp;D, em tema ligado à proposta original. Este trabalho automatiza um instrumento do planejamento energético: o diagrama de fluxo de energia.</a:t>
             </a:r>
           </a:p>
         </p:txBody>
@@ -14011,9 +14425,117 @@
           </a:p>
         </p:txBody>
       </p:sp>
+      <p:sp>
+        <p:nvSpPr>
+          <p:cNvPr id="49" name="Google Shape;49;p8"/>
+          <p:cNvSpPr txBox="1"/>
+          <p:nvPr>
+            <p:ph idx="12" type="sldNum"/>
+          </p:nvPr>
+        </p:nvSpPr>
+        <p:spPr>
+          <a:xfrm>
+            <a:off x="8610600" y="6356350"/>
+            <a:ext cx="2743200" cy="365125"/>
+          </a:xfrm>
+          <a:prstGeom prst="rect">
+            <a:avLst/>
+          </a:prstGeom>
+          <a:noFill/>
+          <a:ln>
+            <a:noFill/>
+          </a:ln>
+        </p:spPr>
+        <p:txBody>
+          <a:bodyPr anchorCtr="0" anchor="ctr" bIns="45700" lIns="91425" spcFirstLastPara="1" rIns="91425" wrap="square" tIns="45700">
+            <a:noAutofit/>
+          </a:bodyPr>
+          <a:lstStyle>
+            <a:lvl1pPr indent="0" lvl="0" marL="0" algn="r">
+              <a:spcBef>
+                <a:spcPts val="0"/>
+              </a:spcBef>
+              <a:buNone/>
+              <a:defRPr/>
+            </a:lvl1pPr>
+            <a:lvl2pPr indent="0" lvl="1" marL="0" algn="r">
+              <a:spcBef>
+                <a:spcPts val="0"/>
+              </a:spcBef>
+              <a:buNone/>
+              <a:defRPr/>
+            </a:lvl2pPr>
+            <a:lvl3pPr indent="0" lvl="2" marL="0" algn="r">
+              <a:spcBef>
+                <a:spcPts val="0"/>
+              </a:spcBef>
+              <a:buNone/>
+              <a:defRPr/>
+            </a:lvl3pPr>
+            <a:lvl4pPr indent="0" lvl="3" marL="0" algn="r">
+              <a:spcBef>
+                <a:spcPts val="0"/>
+              </a:spcBef>
+              <a:buNone/>
+              <a:defRPr/>
+            </a:lvl4pPr>
+            <a:lvl5pPr indent="0" lvl="4" marL="0" algn="r">
+              <a:spcBef>
+                <a:spcPts val="0"/>
+              </a:spcBef>
+              <a:buNone/>
+              <a:defRPr/>
+            </a:lvl5pPr>
+            <a:lvl6pPr indent="0" lvl="5" marL="0" algn="r">
+              <a:spcBef>
+                <a:spcPts val="0"/>
+              </a:spcBef>
+              <a:buNone/>
+              <a:defRPr/>
+            </a:lvl6pPr>
+            <a:lvl7pPr indent="0" lvl="6" marL="0" algn="r">
+              <a:spcBef>
+                <a:spcPts val="0"/>
+              </a:spcBef>
+              <a:buNone/>
+              <a:defRPr/>
+            </a:lvl7pPr>
+            <a:lvl8pPr indent="0" lvl="7" marL="0" algn="r">
+              <a:spcBef>
+                <a:spcPts val="0"/>
+              </a:spcBef>
+              <a:buNone/>
+              <a:defRPr/>
+            </a:lvl8pPr>
+            <a:lvl9pPr indent="0" lvl="8" marL="0" algn="r">
+              <a:spcBef>
+                <a:spcPts val="0"/>
+              </a:spcBef>
+              <a:buNone/>
+              <a:defRPr/>
+            </a:lvl9pPr>
+          </a:lstStyle>
+          <a:p>
+            <a:pPr indent="0" lvl="0" marL="0" rtl="0" algn="r">
+              <a:spcBef>
+                <a:spcPts val="0"/>
+              </a:spcBef>
+              <a:spcAft>
+                <a:spcPts val="0"/>
+              </a:spcAft>
+              <a:buNone/>
+            </a:pPr>
+            <a:fld id="{00000000-1234-1234-1234-123412341234}" type="slidenum">
+              <a:rPr lang="pt-BR"/>
+              <a:t>‹#›</a:t>
+            </a:fld>
+            <a:endParaRPr/>
+          </a:p>
+        </p:txBody>
+      </p:sp>
       <p:pic>
         <p:nvPicPr>
-          <p:cNvPr id="4" name="RES manual" descr="cadeias_recorte.png"/>
+          <p:cNvPr id="50" name="Diagrama manual" descr="cadeias_recorte.png"/>
           <p:cNvPicPr>
             <a:picLocks noChangeAspect="1"/>
           </p:cNvPicPr>
@@ -14042,7 +14564,7 @@
       </p:pic>
       <p:sp>
         <p:nvSpPr>
-          <p:cNvPr id="5" name="TextBox 4"/>
+          <p:cNvPr id="51" name="TextBox 50"/>
           <p:cNvSpPr txBox="1"/>
           <p:nvPr/>
         </p:nvSpPr>
@@ -14080,14 +14602,14 @@
                 </a:solidFill>
                 <a:latin typeface="Calibri"/>
               </a:rPr>
-              <a:t>RES de referência do projeto, desenhado à mão</a:t>
+              <a:t>Diagrama de referência do projeto, desenhado à mão</a:t>
             </a:r>
           </a:p>
         </p:txBody>
       </p:sp>
       <p:sp>
         <p:nvSpPr>
-          <p:cNvPr id="6" name="TextBox 5"/>
+          <p:cNvPr id="52" name="TextBox 51"/>
           <p:cNvSpPr txBox="1"/>
           <p:nvPr/>
         </p:nvSpPr>
@@ -14186,7 +14708,7 @@
       </p:sp>
       <p:sp>
         <p:nvSpPr>
-          <p:cNvPr id="7" name="Stat nós"/>
+          <p:cNvPr id="53" name="Stat nós"/>
           <p:cNvSpPr/>
           <p:nvPr/>
         </p:nvSpPr>
@@ -14258,7 +14780,7 @@
       </p:sp>
       <p:sp>
         <p:nvSpPr>
-          <p:cNvPr id="8" name="Stat arestas"/>
+          <p:cNvPr id="54" name="Stat arestas"/>
           <p:cNvSpPr/>
           <p:nvPr/>
         </p:nvSpPr>
@@ -14330,7 +14852,7 @@
       </p:sp>
       <p:sp>
         <p:nvSpPr>
-          <p:cNvPr id="9" name="Stat de desenho à mão"/>
+          <p:cNvPr id="55" name="Stat de desenho à mão"/>
           <p:cNvSpPr/>
           <p:nvPr/>
         </p:nvSpPr>
@@ -14402,7 +14924,7 @@
       </p:sp>
       <p:sp>
         <p:nvSpPr>
-          <p:cNvPr id="10" name="Problema"/>
+          <p:cNvPr id="56" name="Problema"/>
           <p:cNvSpPr/>
           <p:nvPr/>
         </p:nvSpPr>
@@ -14550,7 +15072,115 @@
       </p:sp>
       <p:sp>
         <p:nvSpPr>
-          <p:cNvPr id="4" name="otoole viz res"/>
+          <p:cNvPr id="49" name="Google Shape;49;p8"/>
+          <p:cNvSpPr txBox="1"/>
+          <p:nvPr>
+            <p:ph idx="12" type="sldNum"/>
+          </p:nvPr>
+        </p:nvSpPr>
+        <p:spPr>
+          <a:xfrm>
+            <a:off x="8610600" y="6356350"/>
+            <a:ext cx="2743200" cy="365125"/>
+          </a:xfrm>
+          <a:prstGeom prst="rect">
+            <a:avLst/>
+          </a:prstGeom>
+          <a:noFill/>
+          <a:ln>
+            <a:noFill/>
+          </a:ln>
+        </p:spPr>
+        <p:txBody>
+          <a:bodyPr anchorCtr="0" anchor="ctr" bIns="45700" lIns="91425" spcFirstLastPara="1" rIns="91425" wrap="square" tIns="45700">
+            <a:noAutofit/>
+          </a:bodyPr>
+          <a:lstStyle>
+            <a:lvl1pPr indent="0" lvl="0" marL="0" algn="r">
+              <a:spcBef>
+                <a:spcPts val="0"/>
+              </a:spcBef>
+              <a:buNone/>
+              <a:defRPr/>
+            </a:lvl1pPr>
+            <a:lvl2pPr indent="0" lvl="1" marL="0" algn="r">
+              <a:spcBef>
+                <a:spcPts val="0"/>
+              </a:spcBef>
+              <a:buNone/>
+              <a:defRPr/>
+            </a:lvl2pPr>
+            <a:lvl3pPr indent="0" lvl="2" marL="0" algn="r">
+              <a:spcBef>
+                <a:spcPts val="0"/>
+              </a:spcBef>
+              <a:buNone/>
+              <a:defRPr/>
+            </a:lvl3pPr>
+            <a:lvl4pPr indent="0" lvl="3" marL="0" algn="r">
+              <a:spcBef>
+                <a:spcPts val="0"/>
+              </a:spcBef>
+              <a:buNone/>
+              <a:defRPr/>
+            </a:lvl4pPr>
+            <a:lvl5pPr indent="0" lvl="4" marL="0" algn="r">
+              <a:spcBef>
+                <a:spcPts val="0"/>
+              </a:spcBef>
+              <a:buNone/>
+              <a:defRPr/>
+            </a:lvl5pPr>
+            <a:lvl6pPr indent="0" lvl="5" marL="0" algn="r">
+              <a:spcBef>
+                <a:spcPts val="0"/>
+              </a:spcBef>
+              <a:buNone/>
+              <a:defRPr/>
+            </a:lvl6pPr>
+            <a:lvl7pPr indent="0" lvl="6" marL="0" algn="r">
+              <a:spcBef>
+                <a:spcPts val="0"/>
+              </a:spcBef>
+              <a:buNone/>
+              <a:defRPr/>
+            </a:lvl7pPr>
+            <a:lvl8pPr indent="0" lvl="7" marL="0" algn="r">
+              <a:spcBef>
+                <a:spcPts val="0"/>
+              </a:spcBef>
+              <a:buNone/>
+              <a:defRPr/>
+            </a:lvl8pPr>
+            <a:lvl9pPr indent="0" lvl="8" marL="0" algn="r">
+              <a:spcBef>
+                <a:spcPts val="0"/>
+              </a:spcBef>
+              <a:buNone/>
+              <a:defRPr/>
+            </a:lvl9pPr>
+          </a:lstStyle>
+          <a:p>
+            <a:pPr indent="0" lvl="0" marL="0" rtl="0" algn="r">
+              <a:spcBef>
+                <a:spcPts val="0"/>
+              </a:spcBef>
+              <a:spcAft>
+                <a:spcPts val="0"/>
+              </a:spcAft>
+              <a:buNone/>
+            </a:pPr>
+            <a:fld id="{00000000-1234-1234-1234-123412341234}" type="slidenum">
+              <a:rPr lang="pt-BR"/>
+              <a:t>‹#›</a:t>
+            </a:fld>
+            <a:endParaRPr/>
+          </a:p>
+        </p:txBody>
+      </p:sp>
+      <p:sp>
+        <p:nvSpPr>
+          <p:cNvPr id="50" name="otoole viz res"/>
           <p:cNvSpPr/>
           <p:nvPr/>
         </p:nvSpPr>
@@ -14615,7 +15245,7 @@
                 </a:solidFill>
                 <a:latin typeface="Calibri"/>
               </a:rPr>
-              <a:t>suíte oficial do OSeMOSYS</a:t>
+              <a:t>ferramenta oficial do OSeMOSYS</a:t>
             </a:r>
           </a:p>
           <a:p>
@@ -14642,7 +15272,7 @@
                 </a:solidFill>
                 <a:latin typeface="Calibri"/>
               </a:rPr>
-              <a:t>Gera o RES automaticamente</a:t>
+              <a:t>Gera o diagrama automaticamente</a:t>
             </a:r>
           </a:p>
           <a:p>
@@ -14730,7 +15360,7 @@
       </p:sp>
       <p:sp>
         <p:nvSpPr>
-          <p:cNvPr id="5" name="Sankey e visuais de rede"/>
+          <p:cNvPr id="51" name="Sankey e visuais de rede"/>
           <p:cNvSpPr/>
           <p:nvPr/>
         </p:nvSpPr>
@@ -14795,7 +15425,7 @@
                 </a:solidFill>
                 <a:latin typeface="Calibri"/>
               </a:rPr>
-              <a:t>plataformas de BI</a:t>
+              <a:t>ferramentas como o Power BI</a:t>
             </a:r>
           </a:p>
           <a:p>
@@ -14903,14 +15533,14 @@
                 </a:solidFill>
                 <a:latin typeface="Calibri"/>
               </a:rPr>
-              <a:t>Fluxos reversos ficam ilegíveis</a:t>
+              <a:t>Conexões de retorno ficam ilegíveis</a:t>
             </a:r>
           </a:p>
         </p:txBody>
       </p:sp>
       <p:sp>
         <p:nvSpPr>
-          <p:cNvPr id="6" name="DDFE (este trabalho)"/>
+          <p:cNvPr id="52" name="Este trabalho"/>
           <p:cNvSpPr/>
           <p:nvPr/>
         </p:nvSpPr>
@@ -14953,7 +15583,7 @@
                 </a:solidFill>
                 <a:latin typeface="Calibri"/>
               </a:rPr>
-              <a:t>DDFE (este trabalho)</a:t>
+              <a:t>Este trabalho</a:t>
             </a:r>
           </a:p>
           <a:p>
@@ -15056,7 +15686,7 @@
                 </a:solidFill>
                 <a:latin typeface="Calibri"/>
               </a:rPr>
-              <a:t>Fluxos reversos roteados</a:t>
+              <a:t>Conexões de retorno desenhadas</a:t>
             </a:r>
           </a:p>
           <a:p>
@@ -15090,7 +15720,7 @@
       </p:sp>
       <p:sp>
         <p:nvSpPr>
-          <p:cNvPr id="7" name="TextBox 6"/>
+          <p:cNvPr id="53" name="TextBox 52"/>
           <p:cNvSpPr txBox="1"/>
           <p:nvPr/>
         </p:nvSpPr>
@@ -15128,7 +15758,7 @@
                 </a:solidFill>
                 <a:latin typeface="Calibri"/>
               </a:rPr>
-              <a:t>Na revisão realizada, não foi identificada implementação equivalente nativa em plataforma de BI.</a:t>
+              <a:t>Na revisão realizada, não foi identificada implementação equivalente no Power BI ou em ferramenta similar.</a:t>
             </a:r>
           </a:p>
         </p:txBody>
@@ -15224,7 +15854,115 @@
       </p:sp>
       <p:sp>
         <p:nvSpPr>
-          <p:cNvPr id="4" name="Objetivo geral"/>
+          <p:cNvPr id="49" name="Google Shape;49;p8"/>
+          <p:cNvSpPr txBox="1"/>
+          <p:nvPr>
+            <p:ph idx="12" type="sldNum"/>
+          </p:nvPr>
+        </p:nvSpPr>
+        <p:spPr>
+          <a:xfrm>
+            <a:off x="8610600" y="6356350"/>
+            <a:ext cx="2743200" cy="365125"/>
+          </a:xfrm>
+          <a:prstGeom prst="rect">
+            <a:avLst/>
+          </a:prstGeom>
+          <a:noFill/>
+          <a:ln>
+            <a:noFill/>
+          </a:ln>
+        </p:spPr>
+        <p:txBody>
+          <a:bodyPr anchorCtr="0" anchor="ctr" bIns="45700" lIns="91425" spcFirstLastPara="1" rIns="91425" wrap="square" tIns="45700">
+            <a:noAutofit/>
+          </a:bodyPr>
+          <a:lstStyle>
+            <a:lvl1pPr indent="0" lvl="0" marL="0" algn="r">
+              <a:spcBef>
+                <a:spcPts val="0"/>
+              </a:spcBef>
+              <a:buNone/>
+              <a:defRPr/>
+            </a:lvl1pPr>
+            <a:lvl2pPr indent="0" lvl="1" marL="0" algn="r">
+              <a:spcBef>
+                <a:spcPts val="0"/>
+              </a:spcBef>
+              <a:buNone/>
+              <a:defRPr/>
+            </a:lvl2pPr>
+            <a:lvl3pPr indent="0" lvl="2" marL="0" algn="r">
+              <a:spcBef>
+                <a:spcPts val="0"/>
+              </a:spcBef>
+              <a:buNone/>
+              <a:defRPr/>
+            </a:lvl3pPr>
+            <a:lvl4pPr indent="0" lvl="3" marL="0" algn="r">
+              <a:spcBef>
+                <a:spcPts val="0"/>
+              </a:spcBef>
+              <a:buNone/>
+              <a:defRPr/>
+            </a:lvl4pPr>
+            <a:lvl5pPr indent="0" lvl="4" marL="0" algn="r">
+              <a:spcBef>
+                <a:spcPts val="0"/>
+              </a:spcBef>
+              <a:buNone/>
+              <a:defRPr/>
+            </a:lvl5pPr>
+            <a:lvl6pPr indent="0" lvl="5" marL="0" algn="r">
+              <a:spcBef>
+                <a:spcPts val="0"/>
+              </a:spcBef>
+              <a:buNone/>
+              <a:defRPr/>
+            </a:lvl6pPr>
+            <a:lvl7pPr indent="0" lvl="6" marL="0" algn="r">
+              <a:spcBef>
+                <a:spcPts val="0"/>
+              </a:spcBef>
+              <a:buNone/>
+              <a:defRPr/>
+            </a:lvl7pPr>
+            <a:lvl8pPr indent="0" lvl="7" marL="0" algn="r">
+              <a:spcBef>
+                <a:spcPts val="0"/>
+              </a:spcBef>
+              <a:buNone/>
+              <a:defRPr/>
+            </a:lvl8pPr>
+            <a:lvl9pPr indent="0" lvl="8" marL="0" algn="r">
+              <a:spcBef>
+                <a:spcPts val="0"/>
+              </a:spcBef>
+              <a:buNone/>
+              <a:defRPr/>
+            </a:lvl9pPr>
+          </a:lstStyle>
+          <a:p>
+            <a:pPr indent="0" lvl="0" marL="0" rtl="0" algn="r">
+              <a:spcBef>
+                <a:spcPts val="0"/>
+              </a:spcBef>
+              <a:spcAft>
+                <a:spcPts val="0"/>
+              </a:spcAft>
+              <a:buNone/>
+            </a:pPr>
+            <a:fld id="{00000000-1234-1234-1234-123412341234}" type="slidenum">
+              <a:rPr lang="pt-BR"/>
+              <a:t>‹#›</a:t>
+            </a:fld>
+            <a:endParaRPr/>
+          </a:p>
+        </p:txBody>
+      </p:sp>
+      <p:sp>
+        <p:nvSpPr>
+          <p:cNvPr id="50" name="Objetivo geral"/>
           <p:cNvSpPr/>
           <p:nvPr/>
         </p:nvSpPr>
@@ -15298,14 +16036,14 @@
                 </a:solidFill>
                 <a:latin typeface="Calibri"/>
               </a:rPr>
-              <a:t>gerar automaticamente o RES completo e interativo a partir de duas tabelas que o modelador já mantém, dentro do Power BI.</a:t>
+              <a:t>gerar automaticamente o diagrama de fluxo de energia completo e interativo a partir de duas tabelas que o modelador já mantém, dentro do Power BI.</a:t>
             </a:r>
           </a:p>
         </p:txBody>
       </p:sp>
       <p:sp>
         <p:nvSpPr>
-          <p:cNvPr id="5" name="TextBox 4"/>
+          <p:cNvPr id="51" name="TextBox 50"/>
           <p:cNvSpPr txBox="1"/>
           <p:nvPr/>
         </p:nvSpPr>
@@ -15350,7 +16088,7 @@
       </p:sp>
       <p:sp>
         <p:nvSpPr>
-          <p:cNvPr id="6" name="Especifico 1"/>
+          <p:cNvPr id="52" name="Especifico 1"/>
           <p:cNvSpPr/>
           <p:nvPr/>
         </p:nvSpPr>
@@ -15381,7 +16119,7 @@
       </p:sp>
       <p:sp>
         <p:nvSpPr>
-          <p:cNvPr id="7" name="Oval 6"/>
+          <p:cNvPr id="53" name="Oval 52"/>
           <p:cNvSpPr/>
           <p:nvPr/>
         </p:nvSpPr>
@@ -15429,14 +16167,14 @@
       </p:sp>
       <p:sp>
         <p:nvSpPr>
-          <p:cNvPr id="8" name="TextBox 7"/>
+          <p:cNvPr id="54" name="TextBox 53"/>
           <p:cNvSpPr txBox="1"/>
           <p:nvPr/>
         </p:nvSpPr>
         <p:spPr>
           <a:xfrm>
             <a:off x="1143000" y="4617720"/>
-            <a:ext cx="1920240" cy="1463040"/>
+            <a:ext cx="2011680" cy="1371600"/>
           </a:xfrm>
           <a:prstGeom prst="rect">
             <a:avLst/>
@@ -15476,7 +16214,7 @@
                 <a:spcPct val="100000"/>
               </a:lnSpc>
               <a:spcBef>
-                <a:spcPts val="0"/>
+                <a:spcPts val="200"/>
               </a:spcBef>
               <a:spcAft>
                 <a:spcPts val="0"/>
@@ -15496,7 +16234,7 @@
       </p:sp>
       <p:sp>
         <p:nvSpPr>
-          <p:cNvPr id="9" name="Especifico 2"/>
+          <p:cNvPr id="55" name="Especifico 2"/>
           <p:cNvSpPr/>
           <p:nvPr/>
         </p:nvSpPr>
@@ -15527,7 +16265,7 @@
       </p:sp>
       <p:sp>
         <p:nvSpPr>
-          <p:cNvPr id="10" name="Oval 9"/>
+          <p:cNvPr id="56" name="Oval 55"/>
           <p:cNvSpPr/>
           <p:nvPr/>
         </p:nvSpPr>
@@ -15575,14 +16313,14 @@
       </p:sp>
       <p:sp>
         <p:nvSpPr>
-          <p:cNvPr id="11" name="TextBox 10"/>
+          <p:cNvPr id="57" name="TextBox 56"/>
           <p:cNvSpPr txBox="1"/>
           <p:nvPr/>
         </p:nvSpPr>
         <p:spPr>
           <a:xfrm>
             <a:off x="3803904" y="4617720"/>
-            <a:ext cx="1920240" cy="1463040"/>
+            <a:ext cx="2011680" cy="1371600"/>
           </a:xfrm>
           <a:prstGeom prst="rect">
             <a:avLst/>
@@ -15613,7 +16351,7 @@
                 </a:solidFill>
                 <a:latin typeface="Calibri"/>
               </a:rPr>
-              <a:t>Layout automático</a:t>
+              <a:t>Disposição automática</a:t>
             </a:r>
           </a:p>
           <a:p>
@@ -15622,7 +16360,7 @@
                 <a:spcPct val="100000"/>
               </a:lnSpc>
               <a:spcBef>
-                <a:spcPts val="0"/>
+                <a:spcPts val="200"/>
               </a:spcBef>
               <a:spcAft>
                 <a:spcPts val="0"/>
@@ -15635,14 +16373,14 @@
                 </a:solidFill>
                 <a:latin typeface="Calibri"/>
               </a:rPr>
-              <a:t>Posições e roteamento sem sobreposição, inclusive fluxos reversos</a:t>
+              <a:t>Posições e traçado sem sobreposição, inclusive conexões de retorno</a:t>
             </a:r>
           </a:p>
         </p:txBody>
       </p:sp>
       <p:sp>
         <p:nvSpPr>
-          <p:cNvPr id="12" name="Especifico 3"/>
+          <p:cNvPr id="58" name="Especifico 3"/>
           <p:cNvSpPr/>
           <p:nvPr/>
         </p:nvSpPr>
@@ -15673,7 +16411,7 @@
       </p:sp>
       <p:sp>
         <p:nvSpPr>
-          <p:cNvPr id="13" name="Oval 12"/>
+          <p:cNvPr id="59" name="Oval 58"/>
           <p:cNvSpPr/>
           <p:nvPr/>
         </p:nvSpPr>
@@ -15721,14 +16459,14 @@
       </p:sp>
       <p:sp>
         <p:nvSpPr>
-          <p:cNvPr id="14" name="TextBox 13"/>
+          <p:cNvPr id="60" name="TextBox 59"/>
           <p:cNvSpPr txBox="1"/>
           <p:nvPr/>
         </p:nvSpPr>
         <p:spPr>
           <a:xfrm>
             <a:off x="6464808" y="4617720"/>
-            <a:ext cx="1920240" cy="1463040"/>
+            <a:ext cx="2011680" cy="1371600"/>
           </a:xfrm>
           <a:prstGeom prst="rect">
             <a:avLst/>
@@ -15768,7 +16506,7 @@
                 <a:spcPct val="100000"/>
               </a:lnSpc>
               <a:spcBef>
-                <a:spcPts val="0"/>
+                <a:spcPts val="200"/>
               </a:spcBef>
               <a:spcAft>
                 <a:spcPts val="0"/>
@@ -15788,7 +16526,7 @@
       </p:sp>
       <p:sp>
         <p:nvSpPr>
-          <p:cNvPr id="15" name="Especifico 4"/>
+          <p:cNvPr id="61" name="Especifico 4"/>
           <p:cNvSpPr/>
           <p:nvPr/>
         </p:nvSpPr>
@@ -15819,7 +16557,7 @@
       </p:sp>
       <p:sp>
         <p:nvSpPr>
-          <p:cNvPr id="16" name="Oval 15"/>
+          <p:cNvPr id="62" name="Oval 61"/>
           <p:cNvSpPr/>
           <p:nvPr/>
         </p:nvSpPr>
@@ -15867,14 +16605,14 @@
       </p:sp>
       <p:sp>
         <p:nvSpPr>
-          <p:cNvPr id="17" name="TextBox 16"/>
+          <p:cNvPr id="63" name="TextBox 62"/>
           <p:cNvSpPr txBox="1"/>
           <p:nvPr/>
         </p:nvSpPr>
         <p:spPr>
           <a:xfrm>
             <a:off x="9125712" y="4617720"/>
-            <a:ext cx="1920240" cy="1463040"/>
+            <a:ext cx="2011680" cy="1371600"/>
           </a:xfrm>
           <a:prstGeom prst="rect">
             <a:avLst/>
@@ -15914,7 +16652,7 @@
                 <a:spcPct val="100000"/>
               </a:lnSpc>
               <a:spcBef>
-                <a:spcPts val="0"/>
+                <a:spcPts val="200"/>
               </a:spcBef>
               <a:spcAft>
                 <a:spcPts val="0"/>
@@ -15927,7 +16665,53 @@
                 </a:solidFill>
                 <a:latin typeface="Calibri"/>
               </a:rPr>
-              <a:t>Versionado como texto e documentado para usuário e desenvolvedor</a:t>
+              <a:t>Versionado como texto e documentado:</a:t>
+            </a:r>
+          </a:p>
+          <a:p>
+            <a:pPr algn="l">
+              <a:lnSpc>
+                <a:spcPct val="100000"/>
+              </a:lnSpc>
+              <a:spcBef>
+                <a:spcPts val="200"/>
+              </a:spcBef>
+              <a:spcAft>
+                <a:spcPts val="0"/>
+              </a:spcAft>
+            </a:pPr>
+            <a:r>
+              <a:rPr sz="1300" b="0" i="0">
+                <a:solidFill>
+                  <a:srgbClr val="0B5394"/>
+                </a:solidFill>
+                <a:latin typeface="Calibri"/>
+                <a:hlinkClick r:id="rId3"/>
+              </a:rPr>
+              <a:t>github.com/Freddieij/</a:t>
+            </a:r>
+          </a:p>
+          <a:p>
+            <a:pPr algn="l">
+              <a:lnSpc>
+                <a:spcPct val="100000"/>
+              </a:lnSpc>
+              <a:spcBef>
+                <a:spcPts val="200"/>
+              </a:spcBef>
+              <a:spcAft>
+                <a:spcPts val="0"/>
+              </a:spcAft>
+            </a:pPr>
+            <a:r>
+              <a:rPr sz="1300" b="0" i="0">
+                <a:solidFill>
+                  <a:srgbClr val="0B5394"/>
+                </a:solidFill>
+                <a:latin typeface="Calibri"/>
+                <a:hlinkClick r:id="rId3"/>
+              </a:rPr>
+              <a:t>Power_BI_Borba</a:t>
             </a:r>
           </a:p>
         </p:txBody>
@@ -16023,7 +16807,115 @@
       </p:sp>
       <p:sp>
         <p:nvSpPr>
-          <p:cNvPr id="4" name="Excel"/>
+          <p:cNvPr id="49" name="Google Shape;49;p8"/>
+          <p:cNvSpPr txBox="1"/>
+          <p:nvPr>
+            <p:ph idx="12" type="sldNum"/>
+          </p:nvPr>
+        </p:nvSpPr>
+        <p:spPr>
+          <a:xfrm>
+            <a:off x="8610600" y="6356350"/>
+            <a:ext cx="2743200" cy="365125"/>
+          </a:xfrm>
+          <a:prstGeom prst="rect">
+            <a:avLst/>
+          </a:prstGeom>
+          <a:noFill/>
+          <a:ln>
+            <a:noFill/>
+          </a:ln>
+        </p:spPr>
+        <p:txBody>
+          <a:bodyPr anchorCtr="0" anchor="ctr" bIns="45700" lIns="91425" spcFirstLastPara="1" rIns="91425" wrap="square" tIns="45700">
+            <a:noAutofit/>
+          </a:bodyPr>
+          <a:lstStyle>
+            <a:lvl1pPr indent="0" lvl="0" marL="0" algn="r">
+              <a:spcBef>
+                <a:spcPts val="0"/>
+              </a:spcBef>
+              <a:buNone/>
+              <a:defRPr/>
+            </a:lvl1pPr>
+            <a:lvl2pPr indent="0" lvl="1" marL="0" algn="r">
+              <a:spcBef>
+                <a:spcPts val="0"/>
+              </a:spcBef>
+              <a:buNone/>
+              <a:defRPr/>
+            </a:lvl2pPr>
+            <a:lvl3pPr indent="0" lvl="2" marL="0" algn="r">
+              <a:spcBef>
+                <a:spcPts val="0"/>
+              </a:spcBef>
+              <a:buNone/>
+              <a:defRPr/>
+            </a:lvl3pPr>
+            <a:lvl4pPr indent="0" lvl="3" marL="0" algn="r">
+              <a:spcBef>
+                <a:spcPts val="0"/>
+              </a:spcBef>
+              <a:buNone/>
+              <a:defRPr/>
+            </a:lvl4pPr>
+            <a:lvl5pPr indent="0" lvl="4" marL="0" algn="r">
+              <a:spcBef>
+                <a:spcPts val="0"/>
+              </a:spcBef>
+              <a:buNone/>
+              <a:defRPr/>
+            </a:lvl5pPr>
+            <a:lvl6pPr indent="0" lvl="5" marL="0" algn="r">
+              <a:spcBef>
+                <a:spcPts val="0"/>
+              </a:spcBef>
+              <a:buNone/>
+              <a:defRPr/>
+            </a:lvl6pPr>
+            <a:lvl7pPr indent="0" lvl="6" marL="0" algn="r">
+              <a:spcBef>
+                <a:spcPts val="0"/>
+              </a:spcBef>
+              <a:buNone/>
+              <a:defRPr/>
+            </a:lvl7pPr>
+            <a:lvl8pPr indent="0" lvl="7" marL="0" algn="r">
+              <a:spcBef>
+                <a:spcPts val="0"/>
+              </a:spcBef>
+              <a:buNone/>
+              <a:defRPr/>
+            </a:lvl8pPr>
+            <a:lvl9pPr indent="0" lvl="8" marL="0" algn="r">
+              <a:spcBef>
+                <a:spcPts val="0"/>
+              </a:spcBef>
+              <a:buNone/>
+              <a:defRPr/>
+            </a:lvl9pPr>
+          </a:lstStyle>
+          <a:p>
+            <a:pPr indent="0" lvl="0" marL="0" rtl="0" algn="r">
+              <a:spcBef>
+                <a:spcPts val="0"/>
+              </a:spcBef>
+              <a:spcAft>
+                <a:spcPts val="0"/>
+              </a:spcAft>
+              <a:buNone/>
+            </a:pPr>
+            <a:fld id="{00000000-1234-1234-1234-123412341234}" type="slidenum">
+              <a:rPr lang="pt-BR"/>
+              <a:t>‹#›</a:t>
+            </a:fld>
+            <a:endParaRPr/>
+          </a:p>
+        </p:txBody>
+      </p:sp>
+      <p:sp>
+        <p:nvSpPr>
+          <p:cNvPr id="50" name="Excel"/>
           <p:cNvSpPr/>
           <p:nvPr/>
         </p:nvSpPr>
@@ -16117,7 +17009,7 @@
       </p:sp>
       <p:sp>
         <p:nvSpPr>
-          <p:cNvPr id="5" name="Right Arrow 4"/>
+          <p:cNvPr id="51" name="Right Arrow 50"/>
           <p:cNvSpPr/>
           <p:nvPr/>
         </p:nvSpPr>
@@ -16146,7 +17038,7 @@
       </p:sp>
       <p:sp>
         <p:nvSpPr>
-          <p:cNvPr id="6" name="Power Query (M)"/>
+          <p:cNvPr id="52" name="Power Query (M)"/>
           <p:cNvSpPr/>
           <p:nvPr/>
         </p:nvSpPr>
@@ -16189,7 +17081,7 @@
                 </a:solidFill>
                 <a:latin typeface="Calibri"/>
               </a:rPr>
-              <a:t>BACK-END</a:t>
+              <a:t>CÁLCULO</a:t>
             </a:r>
           </a:p>
           <a:p>
@@ -16241,7 +17133,7 @@
       </p:sp>
       <p:sp>
         <p:nvSpPr>
-          <p:cNvPr id="7" name="Right Arrow 6"/>
+          <p:cNvPr id="53" name="Right Arrow 52"/>
           <p:cNvSpPr/>
           <p:nvPr/>
         </p:nvSpPr>
@@ -16270,7 +17162,7 @@
       </p:sp>
       <p:sp>
         <p:nvSpPr>
-          <p:cNvPr id="8" name="Deneb (Vega v5)"/>
+          <p:cNvPr id="54" name="Deneb (Vega)"/>
           <p:cNvSpPr/>
           <p:nvPr/>
         </p:nvSpPr>
@@ -16313,7 +17205,7 @@
                 </a:solidFill>
                 <a:latin typeface="Calibri"/>
               </a:rPr>
-              <a:t>FRONT-END</a:t>
+              <a:t>DESENHO</a:t>
             </a:r>
           </a:p>
           <a:p>
@@ -16335,7 +17227,7 @@
                 </a:solidFill>
                 <a:latin typeface="Calibri"/>
               </a:rPr>
-              <a:t>Deneb (Vega v5)</a:t>
+              <a:t>Deneb (Vega)</a:t>
             </a:r>
           </a:p>
           <a:p>
@@ -16357,7 +17249,7 @@
                 </a:solidFill>
                 <a:latin typeface="Calibri"/>
               </a:rPr>
-              <a:t>~1.030 linhas · 16 marcas
+              <a:t>~1.030 linhas
 desenha e interage</a:t>
             </a:r>
           </a:p>
@@ -16365,7 +17257,7 @@
       </p:sp>
       <p:sp>
         <p:nvSpPr>
-          <p:cNvPr id="9" name="Right Arrow 8"/>
+          <p:cNvPr id="55" name="Right Arrow 54"/>
           <p:cNvSpPr/>
           <p:nvPr/>
         </p:nvSpPr>
@@ -16394,7 +17286,7 @@
       </p:sp>
       <p:sp>
         <p:nvSpPr>
-          <p:cNvPr id="10" name="Diagrama RES"/>
+          <p:cNvPr id="56" name="Diagrama interativo"/>
           <p:cNvSpPr/>
           <p:nvPr/>
         </p:nvSpPr>
@@ -16459,7 +17351,7 @@
                 </a:solidFill>
                 <a:latin typeface="Calibri"/>
               </a:rPr>
-              <a:t>Diagrama RES</a:t>
+              <a:t>Diagrama interativo</a:t>
             </a:r>
           </a:p>
           <a:p>
@@ -16481,14 +17373,14 @@
                 </a:solidFill>
                 <a:latin typeface="Calibri"/>
               </a:rPr>
-              <a:t>interativo no Power BI</a:t>
+              <a:t>no Power BI</a:t>
             </a:r>
           </a:p>
         </p:txBody>
       </p:sp>
       <p:pic>
         <p:nvPicPr>
-          <p:cNvPr id="11" name="Entrada Excel" descr="fig-entrada-excel.png"/>
+          <p:cNvPr id="57" name="Entrada Excel" descr="fig-entrada-excel.png"/>
           <p:cNvPicPr>
             <a:picLocks noChangeAspect="1"/>
           </p:cNvPicPr>
@@ -16517,7 +17409,7 @@
       </p:pic>
       <p:sp>
         <p:nvSpPr>
-          <p:cNvPr id="12" name="TextBox 11"/>
+          <p:cNvPr id="58" name="TextBox 57"/>
           <p:cNvSpPr txBox="1"/>
           <p:nvPr/>
         </p:nvSpPr>
@@ -16654,7 +17546,7 @@
                 </a:solidFill>
                 <a:latin typeface="Calibri"/>
               </a:rPr>
-              <a:t>Várias saídas = várias linhas (ex.: PROETA1)</a:t>
+              <a:t>Várias saídas = várias linhas (em destaque: produção de etanol)</a:t>
             </a:r>
           </a:p>
           <a:p>
@@ -16725,7 +17617,7 @@
                   <a:srgbClr val="0B5394"/>
                 </a:solidFill>
               </a:rPr>
-              <a:t>Raias elásticas com nós fantasmas</a:t>
+              <a:t>Raias elásticas com “nós fantasmas”</a:t>
             </a:r>
           </a:p>
         </p:txBody>
@@ -16775,40 +17667,378 @@
           </a:p>
         </p:txBody>
       </p:sp>
-      <p:pic>
-        <p:nvPicPr>
-          <p:cNvPr id="4" name="Nos fantasmas" descr="fantasmas.png"/>
-          <p:cNvPicPr>
-            <a:picLocks noChangeAspect="1"/>
-          </p:cNvPicPr>
-          <p:nvPr/>
-        </p:nvPicPr>
-        <p:blipFill>
-          <a:blip r:embed="rId3"/>
-          <a:stretch>
-            <a:fillRect/>
-          </a:stretch>
-        </p:blipFill>
+      <p:sp>
+        <p:nvSpPr>
+          <p:cNvPr id="49" name="Google Shape;49;p8"/>
+          <p:cNvSpPr txBox="1"/>
+          <p:nvPr>
+            <p:ph idx="12" type="sldNum"/>
+          </p:nvPr>
+        </p:nvSpPr>
         <p:spPr>
           <a:xfrm>
-            <a:off x="914400" y="1828800"/>
-            <a:ext cx="7040880" cy="3786451"/>
+            <a:off x="8610600" y="6356350"/>
+            <a:ext cx="2743200" cy="365125"/>
           </a:xfrm>
           <a:prstGeom prst="rect">
             <a:avLst/>
           </a:prstGeom>
+          <a:noFill/>
+          <a:ln>
+            <a:noFill/>
+          </a:ln>
         </p:spPr>
-      </p:pic>
-      <p:sp>
-        <p:nvSpPr>
-          <p:cNvPr id="5" name="TextBox 4"/>
+        <p:txBody>
+          <a:bodyPr anchorCtr="0" anchor="ctr" bIns="45700" lIns="91425" spcFirstLastPara="1" rIns="91425" wrap="square" tIns="45700">
+            <a:noAutofit/>
+          </a:bodyPr>
+          <a:lstStyle>
+            <a:lvl1pPr indent="0" lvl="0" marL="0" algn="r">
+              <a:spcBef>
+                <a:spcPts val="0"/>
+              </a:spcBef>
+              <a:buNone/>
+              <a:defRPr/>
+            </a:lvl1pPr>
+            <a:lvl2pPr indent="0" lvl="1" marL="0" algn="r">
+              <a:spcBef>
+                <a:spcPts val="0"/>
+              </a:spcBef>
+              <a:buNone/>
+              <a:defRPr/>
+            </a:lvl2pPr>
+            <a:lvl3pPr indent="0" lvl="2" marL="0" algn="r">
+              <a:spcBef>
+                <a:spcPts val="0"/>
+              </a:spcBef>
+              <a:buNone/>
+              <a:defRPr/>
+            </a:lvl3pPr>
+            <a:lvl4pPr indent="0" lvl="3" marL="0" algn="r">
+              <a:spcBef>
+                <a:spcPts val="0"/>
+              </a:spcBef>
+              <a:buNone/>
+              <a:defRPr/>
+            </a:lvl4pPr>
+            <a:lvl5pPr indent="0" lvl="4" marL="0" algn="r">
+              <a:spcBef>
+                <a:spcPts val="0"/>
+              </a:spcBef>
+              <a:buNone/>
+              <a:defRPr/>
+            </a:lvl5pPr>
+            <a:lvl6pPr indent="0" lvl="5" marL="0" algn="r">
+              <a:spcBef>
+                <a:spcPts val="0"/>
+              </a:spcBef>
+              <a:buNone/>
+              <a:defRPr/>
+            </a:lvl6pPr>
+            <a:lvl7pPr indent="0" lvl="6" marL="0" algn="r">
+              <a:spcBef>
+                <a:spcPts val="0"/>
+              </a:spcBef>
+              <a:buNone/>
+              <a:defRPr/>
+            </a:lvl7pPr>
+            <a:lvl8pPr indent="0" lvl="7" marL="0" algn="r">
+              <a:spcBef>
+                <a:spcPts val="0"/>
+              </a:spcBef>
+              <a:buNone/>
+              <a:defRPr/>
+            </a:lvl8pPr>
+            <a:lvl9pPr indent="0" lvl="8" marL="0" algn="r">
+              <a:spcBef>
+                <a:spcPts val="0"/>
+              </a:spcBef>
+              <a:buNone/>
+              <a:defRPr/>
+            </a:lvl9pPr>
+          </a:lstStyle>
+          <a:p>
+            <a:pPr indent="0" lvl="0" marL="0" rtl="0" algn="r">
+              <a:spcBef>
+                <a:spcPts val="0"/>
+              </a:spcBef>
+              <a:spcAft>
+                <a:spcPts val="0"/>
+              </a:spcAft>
+              <a:buNone/>
+            </a:pPr>
+            <a:fld id="{00000000-1234-1234-1234-123412341234}" type="slidenum">
+              <a:rPr lang="pt-BR"/>
+              <a:t>‹#›</a:t>
+            </a:fld>
+            <a:endParaRPr/>
+          </a:p>
+        </p:txBody>
+      </p:sp>
+      <p:sp>
+        <p:nvSpPr>
+          <p:cNvPr id="50" name="raia A"/>
+          <p:cNvSpPr/>
+          <p:nvPr/>
+        </p:nvSpPr>
+        <p:spPr>
+          <a:xfrm>
+            <a:off x="4206240" y="1828800"/>
+            <a:ext cx="7068312" cy="640080"/>
+          </a:xfrm>
+          <a:prstGeom prst="rect">
+            <a:avLst/>
+          </a:prstGeom>
+          <a:solidFill>
+            <a:srgbClr val="EAF2FB"/>
+          </a:solidFill>
+          <a:ln w="9525">
+            <a:solidFill>
+              <a:srgbClr val="B9D2EC"/>
+            </a:solidFill>
+          </a:ln>
+        </p:spPr>
+        <p:txBody>
+          <a:bodyPr rtlCol="0" anchor="ctr"/>
+          <a:lstStyle/>
+          <a:p>
+            <a:pPr algn="ctr"/>
+          </a:p>
+        </p:txBody>
+      </p:sp>
+      <p:sp>
+        <p:nvSpPr>
+          <p:cNvPr id="51" name="TextBox 50"/>
           <p:cNvSpPr txBox="1"/>
           <p:nvPr/>
         </p:nvSpPr>
         <p:spPr>
           <a:xfrm>
-            <a:off x="914400" y="5752411"/>
-            <a:ext cx="7040880" cy="320040"/>
+            <a:off x="4279392" y="2011680"/>
+            <a:ext cx="685800" cy="274320"/>
+          </a:xfrm>
+          <a:prstGeom prst="rect">
+            <a:avLst/>
+          </a:prstGeom>
+          <a:noFill/>
+        </p:spPr>
+        <p:txBody>
+          <a:bodyPr wrap="square" anchor="ctr" lIns="0" rIns="0" tIns="0" bIns="0">
+            <a:spAutoFit/>
+          </a:bodyPr>
+          <a:lstStyle/>
+          <a:p>
+            <a:pPr algn="l">
+              <a:lnSpc>
+                <a:spcPct val="100000"/>
+              </a:lnSpc>
+              <a:spcBef>
+                <a:spcPts val="0"/>
+              </a:spcBef>
+              <a:spcAft>
+                <a:spcPts val="0"/>
+              </a:spcAft>
+            </a:pPr>
+            <a:r>
+              <a:rPr sz="1200" b="1" i="0">
+                <a:solidFill>
+                  <a:srgbClr val="3A6EA5"/>
+                </a:solidFill>
+                <a:latin typeface="Calibri"/>
+              </a:rPr>
+              <a:t>raia A</a:t>
+            </a:r>
+          </a:p>
+        </p:txBody>
+      </p:sp>
+      <p:sp>
+        <p:nvSpPr>
+          <p:cNvPr id="52" name="T1"/>
+          <p:cNvSpPr/>
+          <p:nvPr/>
+        </p:nvSpPr>
+        <p:spPr>
+          <a:xfrm>
+            <a:off x="4914900" y="1956816"/>
+            <a:ext cx="1051560" cy="384048"/>
+          </a:xfrm>
+          <a:prstGeom prst="roundRect">
+            <a:avLst>
+              <a:gd name="adj" fmla="val 12000"/>
+            </a:avLst>
+          </a:prstGeom>
+          <a:solidFill>
+            <a:srgbClr val="FFFFFF"/>
+          </a:solidFill>
+          <a:ln w="22225">
+            <a:solidFill>
+              <a:srgbClr val="3A6EA5"/>
+            </a:solidFill>
+          </a:ln>
+        </p:spPr>
+        <p:txBody>
+          <a:bodyPr rtlCol="0" anchor="ctr" wrap="square" lIns="0" rIns="0" tIns="0" bIns="0"/>
+          <a:lstStyle/>
+          <a:p>
+            <a:pPr algn="ctr">
+              <a:lnSpc>
+                <a:spcPct val="100000"/>
+              </a:lnSpc>
+              <a:spcBef>
+                <a:spcPts val="0"/>
+              </a:spcBef>
+              <a:spcAft>
+                <a:spcPts val="0"/>
+              </a:spcAft>
+            </a:pPr>
+            <a:r>
+              <a:rPr sz="1500" b="0" i="0">
+                <a:solidFill>
+                  <a:srgbClr val="1D3F5E"/>
+                </a:solidFill>
+                <a:latin typeface="Calibri"/>
+              </a:rPr>
+              <a:t>T1</a:t>
+            </a:r>
+          </a:p>
+        </p:txBody>
+      </p:sp>
+      <p:sp>
+        <p:nvSpPr>
+          <p:cNvPr id="53" name="T2"/>
+          <p:cNvSpPr/>
+          <p:nvPr/>
+        </p:nvSpPr>
+        <p:spPr>
+          <a:xfrm>
+            <a:off x="7383780" y="1956816"/>
+            <a:ext cx="1051560" cy="384048"/>
+          </a:xfrm>
+          <a:prstGeom prst="roundRect">
+            <a:avLst>
+              <a:gd name="adj" fmla="val 12000"/>
+            </a:avLst>
+          </a:prstGeom>
+          <a:solidFill>
+            <a:srgbClr val="FFFFFF"/>
+          </a:solidFill>
+          <a:ln w="22225">
+            <a:solidFill>
+              <a:srgbClr val="C8102E"/>
+            </a:solidFill>
+          </a:ln>
+        </p:spPr>
+        <p:txBody>
+          <a:bodyPr rtlCol="0" anchor="ctr" wrap="square" lIns="0" rIns="0" tIns="0" bIns="0"/>
+          <a:lstStyle/>
+          <a:p>
+            <a:pPr algn="ctr">
+              <a:lnSpc>
+                <a:spcPct val="100000"/>
+              </a:lnSpc>
+              <a:spcBef>
+                <a:spcPts val="0"/>
+              </a:spcBef>
+              <a:spcAft>
+                <a:spcPts val="0"/>
+              </a:spcAft>
+            </a:pPr>
+            <a:r>
+              <a:rPr sz="1500" b="0" i="0">
+                <a:solidFill>
+                  <a:srgbClr val="1D3F5E"/>
+                </a:solidFill>
+                <a:latin typeface="Calibri"/>
+              </a:rPr>
+              <a:t>T2</a:t>
+            </a:r>
+          </a:p>
+        </p:txBody>
+      </p:sp>
+      <p:sp>
+        <p:nvSpPr>
+          <p:cNvPr id="54" name="T3"/>
+          <p:cNvSpPr/>
+          <p:nvPr/>
+        </p:nvSpPr>
+        <p:spPr>
+          <a:xfrm>
+            <a:off x="8938260" y="1956816"/>
+            <a:ext cx="1051560" cy="384048"/>
+          </a:xfrm>
+          <a:prstGeom prst="roundRect">
+            <a:avLst>
+              <a:gd name="adj" fmla="val 12000"/>
+            </a:avLst>
+          </a:prstGeom>
+          <a:solidFill>
+            <a:srgbClr val="FFFFFF"/>
+          </a:solidFill>
+          <a:ln w="22225">
+            <a:solidFill>
+              <a:srgbClr val="C8102E"/>
+            </a:solidFill>
+          </a:ln>
+        </p:spPr>
+        <p:txBody>
+          <a:bodyPr rtlCol="0" anchor="ctr" wrap="square" lIns="0" rIns="0" tIns="0" bIns="0"/>
+          <a:lstStyle/>
+          <a:p>
+            <a:pPr algn="ctr">
+              <a:lnSpc>
+                <a:spcPct val="100000"/>
+              </a:lnSpc>
+              <a:spcBef>
+                <a:spcPts val="0"/>
+              </a:spcBef>
+              <a:spcAft>
+                <a:spcPts val="0"/>
+              </a:spcAft>
+            </a:pPr>
+            <a:r>
+              <a:rPr sz="1500" b="0" i="0">
+                <a:solidFill>
+                  <a:srgbClr val="1D3F5E"/>
+                </a:solidFill>
+                <a:latin typeface="Calibri"/>
+              </a:rPr>
+              <a:t>T3</a:t>
+            </a:r>
+          </a:p>
+        </p:txBody>
+      </p:sp>
+      <p:cxnSp>
+        <p:nvCxnSpPr>
+          <p:cNvPr id="55" name="Connector 54"/>
+          <p:cNvCxnSpPr/>
+          <p:nvPr/>
+        </p:nvCxnSpPr>
+        <p:spPr>
+          <a:xfrm>
+            <a:off x="5966460" y="2148840"/>
+            <a:ext cx="5125212" cy="0"/>
+          </a:xfrm>
+          <a:prstGeom prst="line">
+            <a:avLst/>
+          </a:prstGeom>
+          <a:ln w="31750">
+            <a:solidFill>
+              <a:srgbClr val="C8102E"/>
+            </a:solidFill>
+            <a:tailEnd type="triangle" w="med" len="med"/>
+          </a:ln>
+        </p:spPr>
+      </p:cxnSp>
+      <p:sp>
+        <p:nvSpPr>
+          <p:cNvPr id="56" name="TextBox 55"/>
+          <p:cNvSpPr txBox="1"/>
+          <p:nvPr/>
+        </p:nvSpPr>
+        <p:spPr>
+          <a:xfrm>
+            <a:off x="914400" y="1828800"/>
+            <a:ext cx="3017520" cy="1325880"/>
           </a:xfrm>
           <a:prstGeom prst="rect">
             <a:avLst/>
@@ -16821,7 +18051,7 @@
           </a:bodyPr>
           <a:lstStyle/>
           <a:p>
-            <a:pPr algn="ctr">
+            <a:pPr algn="l">
               <a:lnSpc>
                 <a:spcPct val="100000"/>
               </a:lnSpc>
@@ -16833,45 +18063,246 @@
               </a:spcAft>
             </a:pPr>
             <a:r>
-              <a:rPr sz="1300" b="0" i="0">
-                <a:solidFill>
-                  <a:srgbClr val="595959"/>
+              <a:rPr sz="1700" b="1" i="0">
+                <a:solidFill>
+                  <a:srgbClr val="0B5394"/>
                 </a:solidFill>
                 <a:latin typeface="Calibri"/>
               </a:rPr>
-              <a:t>Troca deliberada: diagrama um pouco mais alto, algoritmo determinístico.</a:t>
+              <a:t>(a) O problema</a:t>
             </a:r>
           </a:p>
+          <a:p>
+            <a:pPr algn="l">
+              <a:lnSpc>
+                <a:spcPct val="100000"/>
+              </a:lnSpc>
+              <a:spcBef>
+                <a:spcPts val="300"/>
+              </a:spcBef>
+              <a:spcAft>
+                <a:spcPts val="0"/>
+              </a:spcAft>
+            </a:pPr>
+            <a:r>
+              <a:rPr sz="1400" b="0" i="0">
+                <a:solidFill>
+                  <a:srgbClr val="595959"/>
+                </a:solidFill>
+                <a:latin typeface="Calibri"/>
+              </a:rPr>
+              <a:t>A conexão longa que sai da tecnologia T1 passa por cima de T2 e T3.</a:t>
+            </a:r>
+          </a:p>
         </p:txBody>
       </p:sp>
       <p:sp>
         <p:nvSpPr>
-          <p:cNvPr id="6" name="O problema"/>
+          <p:cNvPr id="57" name="raia A"/>
           <p:cNvSpPr/>
           <p:nvPr/>
         </p:nvSpPr>
         <p:spPr>
           <a:xfrm>
-            <a:off x="8321040" y="1828800"/>
-            <a:ext cx="2953512" cy="1298448"/>
+            <a:off x="4206240" y="2834640"/>
+            <a:ext cx="7068312" cy="1280160"/>
+          </a:xfrm>
+          <a:prstGeom prst="rect">
+            <a:avLst/>
+          </a:prstGeom>
+          <a:solidFill>
+            <a:srgbClr val="EAF2FB"/>
+          </a:solidFill>
+          <a:ln w="9525">
+            <a:solidFill>
+              <a:srgbClr val="B9D2EC"/>
+            </a:solidFill>
+          </a:ln>
+        </p:spPr>
+        <p:txBody>
+          <a:bodyPr rtlCol="0" anchor="ctr"/>
+          <a:lstStyle/>
+          <a:p>
+            <a:pPr algn="ctr"/>
+          </a:p>
+        </p:txBody>
+      </p:sp>
+      <p:sp>
+        <p:nvSpPr>
+          <p:cNvPr id="58" name="TextBox 57"/>
+          <p:cNvSpPr txBox="1"/>
+          <p:nvPr/>
+        </p:nvSpPr>
+        <p:spPr>
+          <a:xfrm>
+            <a:off x="4279392" y="3172968"/>
+            <a:ext cx="685800" cy="274320"/>
+          </a:xfrm>
+          <a:prstGeom prst="rect">
+            <a:avLst/>
+          </a:prstGeom>
+          <a:noFill/>
+        </p:spPr>
+        <p:txBody>
+          <a:bodyPr wrap="square" anchor="ctr" lIns="0" rIns="0" tIns="0" bIns="0">
+            <a:spAutoFit/>
+          </a:bodyPr>
+          <a:lstStyle/>
+          <a:p>
+            <a:pPr algn="l">
+              <a:lnSpc>
+                <a:spcPct val="100000"/>
+              </a:lnSpc>
+              <a:spcBef>
+                <a:spcPts val="0"/>
+              </a:spcBef>
+              <a:spcAft>
+                <a:spcPts val="0"/>
+              </a:spcAft>
+            </a:pPr>
+            <a:r>
+              <a:rPr sz="1200" b="1" i="0">
+                <a:solidFill>
+                  <a:srgbClr val="3A6EA5"/>
+                </a:solidFill>
+                <a:latin typeface="Calibri"/>
+              </a:rPr>
+              <a:t>raia A</a:t>
+            </a:r>
+          </a:p>
+        </p:txBody>
+      </p:sp>
+      <p:sp>
+        <p:nvSpPr>
+          <p:cNvPr id="59" name="TextBox 58"/>
+          <p:cNvSpPr txBox="1"/>
+          <p:nvPr/>
+        </p:nvSpPr>
+        <p:spPr>
+          <a:xfrm>
+            <a:off x="7292340" y="2862072"/>
+            <a:ext cx="1234439" cy="228600"/>
+          </a:xfrm>
+          <a:prstGeom prst="rect">
+            <a:avLst/>
+          </a:prstGeom>
+          <a:noFill/>
+        </p:spPr>
+        <p:txBody>
+          <a:bodyPr wrap="square" anchor="t" lIns="0" rIns="0" tIns="0" bIns="0">
+            <a:spAutoFit/>
+          </a:bodyPr>
+          <a:lstStyle/>
+          <a:p>
+            <a:pPr algn="ctr">
+              <a:lnSpc>
+                <a:spcPct val="100000"/>
+              </a:lnSpc>
+              <a:spcBef>
+                <a:spcPts val="0"/>
+              </a:spcBef>
+              <a:spcAft>
+                <a:spcPts val="0"/>
+              </a:spcAft>
+            </a:pPr>
+            <a:r>
+              <a:rPr sz="1200" b="0" i="1">
+                <a:solidFill>
+                  <a:srgbClr val="8C8C8C"/>
+                </a:solidFill>
+                <a:latin typeface="Calibri"/>
+              </a:rPr>
+              <a:t>nó fantasma</a:t>
+            </a:r>
+          </a:p>
+        </p:txBody>
+      </p:sp>
+      <p:sp>
+        <p:nvSpPr>
+          <p:cNvPr id="60" name="no fantasma"/>
+          <p:cNvSpPr/>
+          <p:nvPr/>
+        </p:nvSpPr>
+        <p:spPr>
+          <a:xfrm>
+            <a:off x="7383780" y="3118104"/>
+            <a:ext cx="1051560" cy="384048"/>
           </a:xfrm>
           <a:prstGeom prst="roundRect">
             <a:avLst>
-              <a:gd name="adj" fmla="val 6000"/>
+              <a:gd name="adj" fmla="val 12000"/>
             </a:avLst>
           </a:prstGeom>
           <a:solidFill>
-            <a:srgbClr val="F3F3F3"/>
+            <a:srgbClr val="F2F2F2"/>
+          </a:solidFill>
+          <a:ln w="19050">
+            <a:solidFill>
+              <a:srgbClr val="8C8C8C"/>
+            </a:solidFill>
+            <a:prstDash val="dash"/>
+          </a:ln>
+        </p:spPr>
+        <p:txBody>
+          <a:bodyPr rtlCol="0" anchor="ctr"/>
+          <a:lstStyle/>
+          <a:p>
+            <a:pPr algn="ctr"/>
+          </a:p>
+        </p:txBody>
+      </p:sp>
+      <p:sp>
+        <p:nvSpPr>
+          <p:cNvPr id="61" name="Down Arrow 60"/>
+          <p:cNvSpPr/>
+          <p:nvPr/>
+        </p:nvSpPr>
+        <p:spPr>
+          <a:xfrm>
+            <a:off x="8490204" y="3419856"/>
+            <a:ext cx="146304" cy="274320"/>
+          </a:xfrm>
+          <a:prstGeom prst="downArrow">
+            <a:avLst/>
+          </a:prstGeom>
+          <a:solidFill>
+            <a:srgbClr val="9DB4D3"/>
           </a:solidFill>
           <a:ln>
             <a:noFill/>
           </a:ln>
         </p:spPr>
         <p:txBody>
-          <a:bodyPr rtlCol="0" anchor="ctr" wrap="square" lIns="164592" rIns="164592" tIns="164592" bIns="164592"/>
+          <a:bodyPr rtlCol="0" anchor="ctr"/>
           <a:lstStyle/>
           <a:p>
-            <a:pPr algn="l">
+            <a:pPr algn="ctr"/>
+          </a:p>
+        </p:txBody>
+      </p:sp>
+      <p:sp>
+        <p:nvSpPr>
+          <p:cNvPr id="62" name="TextBox 61"/>
+          <p:cNvSpPr txBox="1"/>
+          <p:nvPr/>
+        </p:nvSpPr>
+        <p:spPr>
+          <a:xfrm>
+            <a:off x="8846820" y="2862072"/>
+            <a:ext cx="1234439" cy="228600"/>
+          </a:xfrm>
+          <a:prstGeom prst="rect">
+            <a:avLst/>
+          </a:prstGeom>
+          <a:noFill/>
+        </p:spPr>
+        <p:txBody>
+          <a:bodyPr wrap="square" anchor="t" lIns="0" rIns="0" tIns="0" bIns="0">
+            <a:spAutoFit/>
+          </a:bodyPr>
+          <a:lstStyle/>
+          <a:p>
+            <a:pPr algn="ctr">
               <a:lnSpc>
                 <a:spcPct val="100000"/>
               </a:lnSpc>
@@ -16883,67 +18314,132 @@
               </a:spcAft>
             </a:pPr>
             <a:r>
-              <a:rPr sz="1600" b="1" i="0">
-                <a:solidFill>
-                  <a:srgbClr val="0B5394"/>
+              <a:rPr sz="1200" b="0" i="1">
+                <a:solidFill>
+                  <a:srgbClr val="8C8C8C"/>
                 </a:solidFill>
                 <a:latin typeface="Calibri"/>
               </a:rPr>
-              <a:t>O problema</a:t>
+              <a:t>nó fantasma</a:t>
             </a:r>
           </a:p>
-          <a:p>
-            <a:pPr algn="l">
-              <a:lnSpc>
-                <a:spcPct val="100000"/>
-              </a:lnSpc>
-              <a:spcBef>
-                <a:spcPts val="300"/>
-              </a:spcBef>
-              <a:spcAft>
-                <a:spcPts val="0"/>
-              </a:spcAft>
-            </a:pPr>
-            <a:r>
-              <a:rPr sz="1400" b="0" i="0">
-                <a:solidFill>
-                  <a:srgbClr val="1F1F1F"/>
-                </a:solidFill>
-                <a:latin typeface="Calibri"/>
-              </a:rPr>
-              <a:t>Conexões longas passam por cima de caixas de outras tecnologias.</a:t>
-            </a:r>
-          </a:p>
         </p:txBody>
       </p:sp>
       <p:sp>
         <p:nvSpPr>
-          <p:cNvPr id="7" name="A ideia"/>
+          <p:cNvPr id="63" name="no fantasma"/>
           <p:cNvSpPr/>
           <p:nvPr/>
         </p:nvSpPr>
         <p:spPr>
           <a:xfrm>
-            <a:off x="8321040" y="3310128"/>
-            <a:ext cx="2953512" cy="1298448"/>
+            <a:off x="8938260" y="3118104"/>
+            <a:ext cx="1051560" cy="384048"/>
           </a:xfrm>
           <a:prstGeom prst="roundRect">
             <a:avLst>
-              <a:gd name="adj" fmla="val 6000"/>
+              <a:gd name="adj" fmla="val 12000"/>
             </a:avLst>
           </a:prstGeom>
           <a:solidFill>
-            <a:srgbClr val="F3F3F3"/>
+            <a:srgbClr val="F2F2F2"/>
+          </a:solidFill>
+          <a:ln w="19050">
+            <a:solidFill>
+              <a:srgbClr val="8C8C8C"/>
+            </a:solidFill>
+            <a:prstDash val="dash"/>
+          </a:ln>
+        </p:spPr>
+        <p:txBody>
+          <a:bodyPr rtlCol="0" anchor="ctr"/>
+          <a:lstStyle/>
+          <a:p>
+            <a:pPr algn="ctr"/>
+          </a:p>
+        </p:txBody>
+      </p:sp>
+      <p:sp>
+        <p:nvSpPr>
+          <p:cNvPr id="64" name="Down Arrow 63"/>
+          <p:cNvSpPr/>
+          <p:nvPr/>
+        </p:nvSpPr>
+        <p:spPr>
+          <a:xfrm>
+            <a:off x="10044684" y="3419856"/>
+            <a:ext cx="146304" cy="274320"/>
+          </a:xfrm>
+          <a:prstGeom prst="downArrow">
+            <a:avLst/>
+          </a:prstGeom>
+          <a:solidFill>
+            <a:srgbClr val="9DB4D3"/>
           </a:solidFill>
           <a:ln>
             <a:noFill/>
           </a:ln>
         </p:spPr>
         <p:txBody>
-          <a:bodyPr rtlCol="0" anchor="ctr" wrap="square" lIns="164592" rIns="164592" tIns="164592" bIns="164592"/>
+          <a:bodyPr rtlCol="0" anchor="ctr"/>
           <a:lstStyle/>
           <a:p>
-            <a:pPr algn="l">
+            <a:pPr algn="ctr"/>
+          </a:p>
+        </p:txBody>
+      </p:sp>
+      <p:cxnSp>
+        <p:nvCxnSpPr>
+          <p:cNvPr id="65" name="Connector 64"/>
+          <p:cNvCxnSpPr/>
+          <p:nvPr/>
+        </p:nvCxnSpPr>
+        <p:spPr>
+          <a:xfrm>
+            <a:off x="5966460" y="3310128"/>
+            <a:ext cx="5125212" cy="0"/>
+          </a:xfrm>
+          <a:prstGeom prst="line">
+            <a:avLst/>
+          </a:prstGeom>
+          <a:ln w="31750">
+            <a:solidFill>
+              <a:srgbClr val="1F7A3A"/>
+            </a:solidFill>
+            <a:tailEnd type="triangle" w="med" len="med"/>
+          </a:ln>
+        </p:spPr>
+      </p:cxnSp>
+      <p:sp>
+        <p:nvSpPr>
+          <p:cNvPr id="66" name="T1"/>
+          <p:cNvSpPr/>
+          <p:nvPr/>
+        </p:nvSpPr>
+        <p:spPr>
+          <a:xfrm>
+            <a:off x="4914900" y="3118104"/>
+            <a:ext cx="1051560" cy="384048"/>
+          </a:xfrm>
+          <a:prstGeom prst="roundRect">
+            <a:avLst>
+              <a:gd name="adj" fmla="val 12000"/>
+            </a:avLst>
+          </a:prstGeom>
+          <a:solidFill>
+            <a:srgbClr val="FFFFFF"/>
+          </a:solidFill>
+          <a:ln w="22225">
+            <a:solidFill>
+              <a:srgbClr val="3A6EA5"/>
+            </a:solidFill>
+          </a:ln>
+        </p:spPr>
+        <p:txBody>
+          <a:bodyPr rtlCol="0" anchor="ctr" wrap="square" lIns="0" rIns="0" tIns="0" bIns="0"/>
+          <a:lstStyle/>
+          <a:p>
+            <a:pPr algn="ctr">
               <a:lnSpc>
                 <a:spcPct val="100000"/>
               </a:lnSpc>
@@ -16955,13 +18451,162 @@
               </a:spcAft>
             </a:pPr>
             <a:r>
-              <a:rPr sz="1600" b="1" i="0">
-                <a:solidFill>
-                  <a:srgbClr val="0B5394"/>
+              <a:rPr sz="1500" b="0" i="0">
+                <a:solidFill>
+                  <a:srgbClr val="1D3F5E"/>
                 </a:solidFill>
                 <a:latin typeface="Calibri"/>
               </a:rPr>
-              <a:t>A ideia</a:t>
+              <a:t>T1</a:t>
+            </a:r>
+          </a:p>
+        </p:txBody>
+      </p:sp>
+      <p:sp>
+        <p:nvSpPr>
+          <p:cNvPr id="67" name="T2"/>
+          <p:cNvSpPr/>
+          <p:nvPr/>
+        </p:nvSpPr>
+        <p:spPr>
+          <a:xfrm>
+            <a:off x="7383780" y="3648456"/>
+            <a:ext cx="1051560" cy="384048"/>
+          </a:xfrm>
+          <a:prstGeom prst="roundRect">
+            <a:avLst>
+              <a:gd name="adj" fmla="val 12000"/>
+            </a:avLst>
+          </a:prstGeom>
+          <a:solidFill>
+            <a:srgbClr val="FFFFFF"/>
+          </a:solidFill>
+          <a:ln w="22225">
+            <a:solidFill>
+              <a:srgbClr val="3A6EA5"/>
+            </a:solidFill>
+          </a:ln>
+        </p:spPr>
+        <p:txBody>
+          <a:bodyPr rtlCol="0" anchor="ctr" wrap="square" lIns="0" rIns="0" tIns="0" bIns="0"/>
+          <a:lstStyle/>
+          <a:p>
+            <a:pPr algn="ctr">
+              <a:lnSpc>
+                <a:spcPct val="100000"/>
+              </a:lnSpc>
+              <a:spcBef>
+                <a:spcPts val="0"/>
+              </a:spcBef>
+              <a:spcAft>
+                <a:spcPts val="0"/>
+              </a:spcAft>
+            </a:pPr>
+            <a:r>
+              <a:rPr sz="1500" b="0" i="0">
+                <a:solidFill>
+                  <a:srgbClr val="1D3F5E"/>
+                </a:solidFill>
+                <a:latin typeface="Calibri"/>
+              </a:rPr>
+              <a:t>T2</a:t>
+            </a:r>
+          </a:p>
+        </p:txBody>
+      </p:sp>
+      <p:sp>
+        <p:nvSpPr>
+          <p:cNvPr id="68" name="T3"/>
+          <p:cNvSpPr/>
+          <p:nvPr/>
+        </p:nvSpPr>
+        <p:spPr>
+          <a:xfrm>
+            <a:off x="8938260" y="3648456"/>
+            <a:ext cx="1051560" cy="384048"/>
+          </a:xfrm>
+          <a:prstGeom prst="roundRect">
+            <a:avLst>
+              <a:gd name="adj" fmla="val 12000"/>
+            </a:avLst>
+          </a:prstGeom>
+          <a:solidFill>
+            <a:srgbClr val="FFFFFF"/>
+          </a:solidFill>
+          <a:ln w="22225">
+            <a:solidFill>
+              <a:srgbClr val="3A6EA5"/>
+            </a:solidFill>
+          </a:ln>
+        </p:spPr>
+        <p:txBody>
+          <a:bodyPr rtlCol="0" anchor="ctr" wrap="square" lIns="0" rIns="0" tIns="0" bIns="0"/>
+          <a:lstStyle/>
+          <a:p>
+            <a:pPr algn="ctr">
+              <a:lnSpc>
+                <a:spcPct val="100000"/>
+              </a:lnSpc>
+              <a:spcBef>
+                <a:spcPts val="0"/>
+              </a:spcBef>
+              <a:spcAft>
+                <a:spcPts val="0"/>
+              </a:spcAft>
+            </a:pPr>
+            <a:r>
+              <a:rPr sz="1500" b="0" i="0">
+                <a:solidFill>
+                  <a:srgbClr val="1D3F5E"/>
+                </a:solidFill>
+                <a:latin typeface="Calibri"/>
+              </a:rPr>
+              <a:t>T3</a:t>
+            </a:r>
+          </a:p>
+        </p:txBody>
+      </p:sp>
+      <p:sp>
+        <p:nvSpPr>
+          <p:cNvPr id="69" name="TextBox 68"/>
+          <p:cNvSpPr txBox="1"/>
+          <p:nvPr/>
+        </p:nvSpPr>
+        <p:spPr>
+          <a:xfrm>
+            <a:off x="914400" y="2834640"/>
+            <a:ext cx="3017520" cy="1325880"/>
+          </a:xfrm>
+          <a:prstGeom prst="rect">
+            <a:avLst/>
+          </a:prstGeom>
+          <a:noFill/>
+        </p:spPr>
+        <p:txBody>
+          <a:bodyPr wrap="square" anchor="t" lIns="0" rIns="0" tIns="0" bIns="0">
+            <a:spAutoFit/>
+          </a:bodyPr>
+          <a:lstStyle/>
+          <a:p>
+            <a:pPr algn="l">
+              <a:lnSpc>
+                <a:spcPct val="100000"/>
+              </a:lnSpc>
+              <a:spcBef>
+                <a:spcPts val="0"/>
+              </a:spcBef>
+              <a:spcAft>
+                <a:spcPts val="0"/>
+              </a:spcAft>
+            </a:pPr>
+            <a:r>
+              <a:rPr sz="1700" b="1" i="0">
+                <a:solidFill>
+                  <a:srgbClr val="0B5394"/>
+                </a:solidFill>
+                <a:latin typeface="Calibri"/>
+              </a:rPr>
+              <a:t>(b) A reserva</a:t>
             </a:r>
           </a:p>
           <a:p>
@@ -16979,43 +18624,219 @@
             <a:r>
               <a:rPr sz="1400" b="0" i="0">
                 <a:solidFill>
-                  <a:srgbClr val="1F1F1F"/>
+                  <a:srgbClr val="595959"/>
                 </a:solidFill>
                 <a:latin typeface="Calibri"/>
               </a:rPr>
-              <a:t>Reservar espaço antes de desenhar: cada coluna cruzada ganha um nó fantasma invisível.</a:t>
+              <a:t>Cada coluna cruzada recebe um “nó fantasma”: invisível, ele toma a linha da conexão e empurra T2 e T3 para baixo.</a:t>
             </a:r>
           </a:p>
         </p:txBody>
       </p:sp>
       <p:sp>
         <p:nvSpPr>
-          <p:cNvPr id="8" name="Por que cabe em M"/>
+          <p:cNvPr id="70" name="raia A"/>
           <p:cNvSpPr/>
           <p:nvPr/>
         </p:nvSpPr>
         <p:spPr>
           <a:xfrm>
-            <a:off x="8321040" y="4791456"/>
-            <a:ext cx="2953512" cy="1298448"/>
+            <a:off x="4206240" y="4343400"/>
+            <a:ext cx="7068312" cy="548640"/>
+          </a:xfrm>
+          <a:prstGeom prst="rect">
+            <a:avLst/>
+          </a:prstGeom>
+          <a:solidFill>
+            <a:srgbClr val="EAF2FB"/>
+          </a:solidFill>
+          <a:ln w="9525">
+            <a:solidFill>
+              <a:srgbClr val="B9D2EC"/>
+            </a:solidFill>
+          </a:ln>
+        </p:spPr>
+        <p:txBody>
+          <a:bodyPr rtlCol="0" anchor="ctr"/>
+          <a:lstStyle/>
+          <a:p>
+            <a:pPr algn="ctr"/>
+          </a:p>
+        </p:txBody>
+      </p:sp>
+      <p:sp>
+        <p:nvSpPr>
+          <p:cNvPr id="71" name="TextBox 70"/>
+          <p:cNvSpPr txBox="1"/>
+          <p:nvPr/>
+        </p:nvSpPr>
+        <p:spPr>
+          <a:xfrm>
+            <a:off x="4279392" y="4480559"/>
+            <a:ext cx="685800" cy="274320"/>
+          </a:xfrm>
+          <a:prstGeom prst="rect">
+            <a:avLst/>
+          </a:prstGeom>
+          <a:noFill/>
+        </p:spPr>
+        <p:txBody>
+          <a:bodyPr wrap="square" anchor="ctr" lIns="0" rIns="0" tIns="0" bIns="0">
+            <a:spAutoFit/>
+          </a:bodyPr>
+          <a:lstStyle/>
+          <a:p>
+            <a:pPr algn="l">
+              <a:lnSpc>
+                <a:spcPct val="100000"/>
+              </a:lnSpc>
+              <a:spcBef>
+                <a:spcPts val="0"/>
+              </a:spcBef>
+              <a:spcAft>
+                <a:spcPts val="0"/>
+              </a:spcAft>
+            </a:pPr>
+            <a:r>
+              <a:rPr sz="1200" b="1" i="0">
+                <a:solidFill>
+                  <a:srgbClr val="3A6EA5"/>
+                </a:solidFill>
+                <a:latin typeface="Calibri"/>
+              </a:rPr>
+              <a:t>raia A</a:t>
+            </a:r>
+          </a:p>
+        </p:txBody>
+      </p:sp>
+      <p:sp>
+        <p:nvSpPr>
+          <p:cNvPr id="72" name="raia B"/>
+          <p:cNvSpPr/>
+          <p:nvPr/>
+        </p:nvSpPr>
+        <p:spPr>
+          <a:xfrm>
+            <a:off x="4206240" y="4983480"/>
+            <a:ext cx="7068312" cy="548640"/>
+          </a:xfrm>
+          <a:prstGeom prst="rect">
+            <a:avLst/>
+          </a:prstGeom>
+          <a:solidFill>
+            <a:srgbClr val="FCEDE4"/>
+          </a:solidFill>
+          <a:ln w="9525">
+            <a:solidFill>
+              <a:srgbClr val="F0C8AE"/>
+            </a:solidFill>
+          </a:ln>
+        </p:spPr>
+        <p:txBody>
+          <a:bodyPr rtlCol="0" anchor="ctr"/>
+          <a:lstStyle/>
+          <a:p>
+            <a:pPr algn="ctr"/>
+          </a:p>
+        </p:txBody>
+      </p:sp>
+      <p:sp>
+        <p:nvSpPr>
+          <p:cNvPr id="73" name="TextBox 72"/>
+          <p:cNvSpPr txBox="1"/>
+          <p:nvPr/>
+        </p:nvSpPr>
+        <p:spPr>
+          <a:xfrm>
+            <a:off x="4279392" y="5120640"/>
+            <a:ext cx="685800" cy="274320"/>
+          </a:xfrm>
+          <a:prstGeom prst="rect">
+            <a:avLst/>
+          </a:prstGeom>
+          <a:noFill/>
+        </p:spPr>
+        <p:txBody>
+          <a:bodyPr wrap="square" anchor="ctr" lIns="0" rIns="0" tIns="0" bIns="0">
+            <a:spAutoFit/>
+          </a:bodyPr>
+          <a:lstStyle/>
+          <a:p>
+            <a:pPr algn="l">
+              <a:lnSpc>
+                <a:spcPct val="100000"/>
+              </a:lnSpc>
+              <a:spcBef>
+                <a:spcPts val="0"/>
+              </a:spcBef>
+              <a:spcAft>
+                <a:spcPts val="0"/>
+              </a:spcAft>
+            </a:pPr>
+            <a:r>
+              <a:rPr sz="1200" b="1" i="0">
+                <a:solidFill>
+                  <a:srgbClr val="B5541E"/>
+                </a:solidFill>
+                <a:latin typeface="Calibri"/>
+              </a:rPr>
+              <a:t>raia B</a:t>
+            </a:r>
+          </a:p>
+        </p:txBody>
+      </p:sp>
+      <p:cxnSp>
+        <p:nvCxnSpPr>
+          <p:cNvPr id="74" name="Connector 73"/>
+          <p:cNvCxnSpPr/>
+          <p:nvPr/>
+        </p:nvCxnSpPr>
+        <p:spPr>
+          <a:xfrm>
+            <a:off x="5966460" y="4617720"/>
+            <a:ext cx="5125212" cy="0"/>
+          </a:xfrm>
+          <a:prstGeom prst="line">
+            <a:avLst/>
+          </a:prstGeom>
+          <a:ln w="31750">
+            <a:solidFill>
+              <a:srgbClr val="1F7A3A"/>
+            </a:solidFill>
+            <a:tailEnd type="triangle" w="med" len="med"/>
+          </a:ln>
+        </p:spPr>
+      </p:cxnSp>
+      <p:sp>
+        <p:nvSpPr>
+          <p:cNvPr id="75" name="T1"/>
+          <p:cNvSpPr/>
+          <p:nvPr/>
+        </p:nvSpPr>
+        <p:spPr>
+          <a:xfrm>
+            <a:off x="4914900" y="4425696"/>
+            <a:ext cx="1051560" cy="384048"/>
           </a:xfrm>
           <a:prstGeom prst="roundRect">
             <a:avLst>
-              <a:gd name="adj" fmla="val 6000"/>
+              <a:gd name="adj" fmla="val 12000"/>
             </a:avLst>
           </a:prstGeom>
           <a:solidFill>
-            <a:srgbClr val="F3F3F3"/>
+            <a:srgbClr val="FFFFFF"/>
           </a:solidFill>
-          <a:ln>
-            <a:noFill/>
+          <a:ln w="22225">
+            <a:solidFill>
+              <a:srgbClr val="3A6EA5"/>
+            </a:solidFill>
           </a:ln>
         </p:spPr>
         <p:txBody>
-          <a:bodyPr rtlCol="0" anchor="ctr" wrap="square" lIns="164592" rIns="164592" tIns="164592" bIns="164592"/>
+          <a:bodyPr rtlCol="0" anchor="ctr" wrap="square" lIns="0" rIns="0" tIns="0" bIns="0"/>
           <a:lstStyle/>
           <a:p>
-            <a:pPr algn="l">
+            <a:pPr algn="ctr">
               <a:lnSpc>
                 <a:spcPct val="100000"/>
               </a:lnSpc>
@@ -17027,13 +18848,162 @@
               </a:spcAft>
             </a:pPr>
             <a:r>
-              <a:rPr sz="1600" b="1" i="0">
-                <a:solidFill>
-                  <a:srgbClr val="0B5394"/>
+              <a:rPr sz="1500" b="0" i="0">
+                <a:solidFill>
+                  <a:srgbClr val="1D3F5E"/>
                 </a:solidFill>
                 <a:latin typeface="Calibri"/>
               </a:rPr>
-              <a:t>Por que cabe em M</a:t>
+              <a:t>T1</a:t>
+            </a:r>
+          </a:p>
+        </p:txBody>
+      </p:sp>
+      <p:sp>
+        <p:nvSpPr>
+          <p:cNvPr id="76" name="T2"/>
+          <p:cNvSpPr/>
+          <p:nvPr/>
+        </p:nvSpPr>
+        <p:spPr>
+          <a:xfrm>
+            <a:off x="7383780" y="5065776"/>
+            <a:ext cx="1051560" cy="384048"/>
+          </a:xfrm>
+          <a:prstGeom prst="roundRect">
+            <a:avLst>
+              <a:gd name="adj" fmla="val 12000"/>
+            </a:avLst>
+          </a:prstGeom>
+          <a:solidFill>
+            <a:srgbClr val="FFFFFF"/>
+          </a:solidFill>
+          <a:ln w="22225">
+            <a:solidFill>
+              <a:srgbClr val="B5541E"/>
+            </a:solidFill>
+          </a:ln>
+        </p:spPr>
+        <p:txBody>
+          <a:bodyPr rtlCol="0" anchor="ctr" wrap="square" lIns="0" rIns="0" tIns="0" bIns="0"/>
+          <a:lstStyle/>
+          <a:p>
+            <a:pPr algn="ctr">
+              <a:lnSpc>
+                <a:spcPct val="100000"/>
+              </a:lnSpc>
+              <a:spcBef>
+                <a:spcPts val="0"/>
+              </a:spcBef>
+              <a:spcAft>
+                <a:spcPts val="0"/>
+              </a:spcAft>
+            </a:pPr>
+            <a:r>
+              <a:rPr sz="1500" b="0" i="0">
+                <a:solidFill>
+                  <a:srgbClr val="B5541E"/>
+                </a:solidFill>
+                <a:latin typeface="Calibri"/>
+              </a:rPr>
+              <a:t>T2</a:t>
+            </a:r>
+          </a:p>
+        </p:txBody>
+      </p:sp>
+      <p:sp>
+        <p:nvSpPr>
+          <p:cNvPr id="77" name="T3"/>
+          <p:cNvSpPr/>
+          <p:nvPr/>
+        </p:nvSpPr>
+        <p:spPr>
+          <a:xfrm>
+            <a:off x="8938260" y="5065776"/>
+            <a:ext cx="1051560" cy="384048"/>
+          </a:xfrm>
+          <a:prstGeom prst="roundRect">
+            <a:avLst>
+              <a:gd name="adj" fmla="val 12000"/>
+            </a:avLst>
+          </a:prstGeom>
+          <a:solidFill>
+            <a:srgbClr val="FFFFFF"/>
+          </a:solidFill>
+          <a:ln w="22225">
+            <a:solidFill>
+              <a:srgbClr val="B5541E"/>
+            </a:solidFill>
+          </a:ln>
+        </p:spPr>
+        <p:txBody>
+          <a:bodyPr rtlCol="0" anchor="ctr" wrap="square" lIns="0" rIns="0" tIns="0" bIns="0"/>
+          <a:lstStyle/>
+          <a:p>
+            <a:pPr algn="ctr">
+              <a:lnSpc>
+                <a:spcPct val="100000"/>
+              </a:lnSpc>
+              <a:spcBef>
+                <a:spcPts val="0"/>
+              </a:spcBef>
+              <a:spcAft>
+                <a:spcPts val="0"/>
+              </a:spcAft>
+            </a:pPr>
+            <a:r>
+              <a:rPr sz="1500" b="0" i="0">
+                <a:solidFill>
+                  <a:srgbClr val="B5541E"/>
+                </a:solidFill>
+                <a:latin typeface="Calibri"/>
+              </a:rPr>
+              <a:t>T3</a:t>
+            </a:r>
+          </a:p>
+        </p:txBody>
+      </p:sp>
+      <p:sp>
+        <p:nvSpPr>
+          <p:cNvPr id="78" name="TextBox 77"/>
+          <p:cNvSpPr txBox="1"/>
+          <p:nvPr/>
+        </p:nvSpPr>
+        <p:spPr>
+          <a:xfrm>
+            <a:off x="914400" y="4343400"/>
+            <a:ext cx="3017520" cy="1325880"/>
+          </a:xfrm>
+          <a:prstGeom prst="rect">
+            <a:avLst/>
+          </a:prstGeom>
+          <a:noFill/>
+        </p:spPr>
+        <p:txBody>
+          <a:bodyPr wrap="square" anchor="t" lIns="0" rIns="0" tIns="0" bIns="0">
+            <a:spAutoFit/>
+          </a:bodyPr>
+          <a:lstStyle/>
+          <a:p>
+            <a:pPr algn="l">
+              <a:lnSpc>
+                <a:spcPct val="100000"/>
+              </a:lnSpc>
+              <a:spcBef>
+                <a:spcPts val="0"/>
+              </a:spcBef>
+              <a:spcAft>
+                <a:spcPts val="0"/>
+              </a:spcAft>
+            </a:pPr>
+            <a:r>
+              <a:rPr sz="1700" b="1" i="0">
+                <a:solidFill>
+                  <a:srgbClr val="0B5394"/>
+                </a:solidFill>
+                <a:latin typeface="Calibri"/>
+              </a:rPr>
+              <a:t>(c) O resultado</a:t>
             </a:r>
           </a:p>
           <a:p>
@@ -17051,11 +19021,65 @@
             <a:r>
               <a:rPr sz="1400" b="0" i="0">
                 <a:solidFill>
-                  <a:srgbClr val="1F1F1F"/>
+                  <a:srgbClr val="595959"/>
                 </a:solidFill>
                 <a:latin typeface="Calibri"/>
               </a:rPr>
-              <a:t>Sem busca em grade nem estado mutável: só agrupamentos, somas acumuladas e junções de tabela.</a:t>
+              <a:t>A conexão segue por uma linha livre; T2 e T3 passam para a raia seguinte.</a:t>
+            </a:r>
+          </a:p>
+        </p:txBody>
+      </p:sp>
+      <p:sp>
+        <p:nvSpPr>
+          <p:cNvPr id="79" name="TextBox 78"/>
+          <p:cNvSpPr txBox="1"/>
+          <p:nvPr/>
+        </p:nvSpPr>
+        <p:spPr>
+          <a:xfrm>
+            <a:off x="914400" y="5760720"/>
+            <a:ext cx="10360152" cy="457200"/>
+          </a:xfrm>
+          <a:prstGeom prst="rect">
+            <a:avLst/>
+          </a:prstGeom>
+          <a:noFill/>
+        </p:spPr>
+        <p:txBody>
+          <a:bodyPr wrap="square" anchor="t" lIns="0" rIns="0" tIns="0" bIns="0">
+            <a:spAutoFit/>
+          </a:bodyPr>
+          <a:lstStyle/>
+          <a:p>
+            <a:pPr algn="l">
+              <a:lnSpc>
+                <a:spcPct val="100000"/>
+              </a:lnSpc>
+              <a:spcBef>
+                <a:spcPts val="0"/>
+              </a:spcBef>
+              <a:spcAft>
+                <a:spcPts val="0"/>
+              </a:spcAft>
+            </a:pPr>
+            <a:r>
+              <a:rPr sz="1400" b="1" i="0">
+                <a:solidFill>
+                  <a:srgbClr val="0B5394"/>
+                </a:solidFill>
+                <a:latin typeface="Calibri"/>
+              </a:rPr>
+              <a:t>Por que funciona na linguagem M: </a:t>
+            </a:r>
+            <a:r>
+              <a:rPr sz="1400" b="0" i="0">
+                <a:solidFill>
+                  <a:srgbClr val="595959"/>
+                </a:solidFill>
+                <a:latin typeface="Calibri"/>
+              </a:rPr>
+              <a:t>sem busca em grade nem estado mutável, apenas agrupamentos, somas acumuladas e junções de tabela.</a:t>
             </a:r>
           </a:p>
         </p:txBody>
@@ -17099,7 +19123,7 @@
                   <a:srgbClr val="0B5394"/>
                 </a:solidFill>
               </a:rPr>
-              <a:t>Fluxos reversos roteados automaticamente</a:t>
+              <a:t>Conexões de retorno no diagrama</a:t>
             </a:r>
           </a:p>
         </p:txBody>
@@ -17149,9 +19173,162 @@
           </a:p>
         </p:txBody>
       </p:sp>
+      <p:sp>
+        <p:nvSpPr>
+          <p:cNvPr id="49" name="Google Shape;49;p8"/>
+          <p:cNvSpPr txBox="1"/>
+          <p:nvPr>
+            <p:ph idx="12" type="sldNum"/>
+          </p:nvPr>
+        </p:nvSpPr>
+        <p:spPr>
+          <a:xfrm>
+            <a:off x="8610600" y="6356350"/>
+            <a:ext cx="2743200" cy="365125"/>
+          </a:xfrm>
+          <a:prstGeom prst="rect">
+            <a:avLst/>
+          </a:prstGeom>
+          <a:noFill/>
+          <a:ln>
+            <a:noFill/>
+          </a:ln>
+        </p:spPr>
+        <p:txBody>
+          <a:bodyPr anchorCtr="0" anchor="ctr" bIns="45700" lIns="91425" spcFirstLastPara="1" rIns="91425" wrap="square" tIns="45700">
+            <a:noAutofit/>
+          </a:bodyPr>
+          <a:lstStyle>
+            <a:lvl1pPr indent="0" lvl="0" marL="0" algn="r">
+              <a:spcBef>
+                <a:spcPts val="0"/>
+              </a:spcBef>
+              <a:buNone/>
+              <a:defRPr/>
+            </a:lvl1pPr>
+            <a:lvl2pPr indent="0" lvl="1" marL="0" algn="r">
+              <a:spcBef>
+                <a:spcPts val="0"/>
+              </a:spcBef>
+              <a:buNone/>
+              <a:defRPr/>
+            </a:lvl2pPr>
+            <a:lvl3pPr indent="0" lvl="2" marL="0" algn="r">
+              <a:spcBef>
+                <a:spcPts val="0"/>
+              </a:spcBef>
+              <a:buNone/>
+              <a:defRPr/>
+            </a:lvl3pPr>
+            <a:lvl4pPr indent="0" lvl="3" marL="0" algn="r">
+              <a:spcBef>
+                <a:spcPts val="0"/>
+              </a:spcBef>
+              <a:buNone/>
+              <a:defRPr/>
+            </a:lvl4pPr>
+            <a:lvl5pPr indent="0" lvl="4" marL="0" algn="r">
+              <a:spcBef>
+                <a:spcPts val="0"/>
+              </a:spcBef>
+              <a:buNone/>
+              <a:defRPr/>
+            </a:lvl5pPr>
+            <a:lvl6pPr indent="0" lvl="5" marL="0" algn="r">
+              <a:spcBef>
+                <a:spcPts val="0"/>
+              </a:spcBef>
+              <a:buNone/>
+              <a:defRPr/>
+            </a:lvl6pPr>
+            <a:lvl7pPr indent="0" lvl="6" marL="0" algn="r">
+              <a:spcBef>
+                <a:spcPts val="0"/>
+              </a:spcBef>
+              <a:buNone/>
+              <a:defRPr/>
+            </a:lvl7pPr>
+            <a:lvl8pPr indent="0" lvl="7" marL="0" algn="r">
+              <a:spcBef>
+                <a:spcPts val="0"/>
+              </a:spcBef>
+              <a:buNone/>
+              <a:defRPr/>
+            </a:lvl8pPr>
+            <a:lvl9pPr indent="0" lvl="8" marL="0" algn="r">
+              <a:spcBef>
+                <a:spcPts val="0"/>
+              </a:spcBef>
+              <a:buNone/>
+              <a:defRPr/>
+            </a:lvl9pPr>
+          </a:lstStyle>
+          <a:p>
+            <a:pPr indent="0" lvl="0" marL="0" rtl="0" algn="r">
+              <a:spcBef>
+                <a:spcPts val="0"/>
+              </a:spcBef>
+              <a:spcAft>
+                <a:spcPts val="0"/>
+              </a:spcAft>
+              <a:buNone/>
+            </a:pPr>
+            <a:fld id="{00000000-1234-1234-1234-123412341234}" type="slidenum">
+              <a:rPr lang="pt-BR"/>
+              <a:t>‹#›</a:t>
+            </a:fld>
+            <a:endParaRPr/>
+          </a:p>
+        </p:txBody>
+      </p:sp>
+      <p:sp>
+        <p:nvSpPr>
+          <p:cNvPr id="50" name="TextBox 49"/>
+          <p:cNvSpPr txBox="1"/>
+          <p:nvPr/>
+        </p:nvSpPr>
+        <p:spPr>
+          <a:xfrm>
+            <a:off x="5956567" y="1737360"/>
+            <a:ext cx="3200400" cy="320040"/>
+          </a:xfrm>
+          <a:prstGeom prst="rect">
+            <a:avLst/>
+          </a:prstGeom>
+          <a:noFill/>
+        </p:spPr>
+        <p:txBody>
+          <a:bodyPr wrap="square" anchor="t" lIns="0" rIns="0" tIns="0" bIns="0">
+            <a:spAutoFit/>
+          </a:bodyPr>
+          <a:lstStyle/>
+          <a:p>
+            <a:pPr algn="r">
+              <a:lnSpc>
+                <a:spcPct val="100000"/>
+              </a:lnSpc>
+              <a:spcBef>
+                <a:spcPts val="0"/>
+              </a:spcBef>
+              <a:spcAft>
+                <a:spcPts val="0"/>
+              </a:spcAft>
+            </a:pPr>
+            <a:r>
+              <a:rPr sz="1300" b="1" i="0">
+                <a:solidFill>
+                  <a:srgbClr val="D95F02"/>
+                </a:solidFill>
+                <a:latin typeface="Calibri"/>
+              </a:rPr>
+              <a:t>gás natural processado (estágio 3)  ↓</a:t>
+            </a:r>
+          </a:p>
+        </p:txBody>
+      </p:sp>
       <p:pic>
         <p:nvPicPr>
-          <p:cNvPr id="4" name="Fluxos reversos" descr="Figura4.png"/>
+          <p:cNvPr id="51" name="Conexoes de retorno" descr="retorno_zoom.png"/>
           <p:cNvPicPr>
             <a:picLocks noChangeAspect="1"/>
           </p:cNvPicPr>
@@ -17165,8 +19342,8 @@
         </p:blipFill>
         <p:spPr>
           <a:xfrm>
-            <a:off x="914400" y="1828800"/>
-            <a:ext cx="7223760" cy="2930045"/>
+            <a:off x="914400" y="2103120"/>
+            <a:ext cx="10360152" cy="1832291"/>
           </a:xfrm>
           <a:prstGeom prst="rect">
             <a:avLst/>
@@ -17180,14 +19357,14 @@
       </p:pic>
       <p:sp>
         <p:nvSpPr>
-          <p:cNvPr id="5" name="TextBox 4"/>
+          <p:cNvPr id="52" name="TextBox 51"/>
           <p:cNvSpPr txBox="1"/>
           <p:nvPr/>
         </p:nvSpPr>
         <p:spPr>
           <a:xfrm>
-            <a:off x="914400" y="4813709"/>
-            <a:ext cx="7223760" cy="274320"/>
+            <a:off x="2237121" y="3981131"/>
+            <a:ext cx="2560320" cy="320040"/>
           </a:xfrm>
           <a:prstGeom prst="rect">
             <a:avLst/>
@@ -17212,27 +19389,216 @@
               </a:spcAft>
             </a:pPr>
             <a:r>
-              <a:rPr sz="1100" b="0" i="0">
-                <a:solidFill>
-                  <a:srgbClr val="595959"/>
+              <a:rPr sz="1300" b="1" i="0">
+                <a:solidFill>
+                  <a:srgbClr val="1D3F5E"/>
                 </a:solidFill>
                 <a:latin typeface="Calibri"/>
               </a:rPr>
-              <a:t>Termelétricas PWRHFO, PWRNGS1 e PWRNGS2: o retorno contorna as caixas pela esquerda</a:t>
+              <a:t>termelétricas a gás natural</a:t>
             </a:r>
           </a:p>
         </p:txBody>
       </p:sp>
       <p:sp>
         <p:nvSpPr>
-          <p:cNvPr id="6" name="Stat 4"/>
+          <p:cNvPr id="53" name="TextBox 52"/>
+          <p:cNvSpPr txBox="1"/>
+          <p:nvPr/>
+        </p:nvSpPr>
+        <p:spPr>
+          <a:xfrm>
+            <a:off x="5781834" y="3981131"/>
+            <a:ext cx="2560320" cy="320040"/>
+          </a:xfrm>
+          <a:prstGeom prst="rect">
+            <a:avLst/>
+          </a:prstGeom>
+          <a:noFill/>
+        </p:spPr>
+        <p:txBody>
+          <a:bodyPr wrap="square" anchor="t" lIns="0" rIns="0" tIns="0" bIns="0">
+            <a:spAutoFit/>
+          </a:bodyPr>
+          <a:lstStyle/>
+          <a:p>
+            <a:pPr algn="ctr">
+              <a:lnSpc>
+                <a:spcPct val="100000"/>
+              </a:lnSpc>
+              <a:spcBef>
+                <a:spcPts val="0"/>
+              </a:spcBef>
+              <a:spcAft>
+                <a:spcPts val="0"/>
+              </a:spcAft>
+            </a:pPr>
+            <a:r>
+              <a:rPr sz="1300" b="1" i="0">
+                <a:solidFill>
+                  <a:srgbClr val="7570B3"/>
+                </a:solidFill>
+                <a:latin typeface="Calibri"/>
+              </a:rPr>
+              <a:t>↑  eletricidade (estágio 2)</a:t>
+            </a:r>
+          </a:p>
+        </p:txBody>
+      </p:sp>
+      <p:sp>
+        <p:nvSpPr>
+          <p:cNvPr id="54" name="O que acontece"/>
           <p:cNvSpPr/>
           <p:nvPr/>
         </p:nvSpPr>
         <p:spPr>
           <a:xfrm>
-            <a:off x="8503920" y="1828800"/>
-            <a:ext cx="2770631" cy="1600200"/>
+            <a:off x="914400" y="4526280"/>
+            <a:ext cx="3291840" cy="1691640"/>
+          </a:xfrm>
+          <a:prstGeom prst="roundRect">
+            <a:avLst>
+              <a:gd name="adj" fmla="val 6000"/>
+            </a:avLst>
+          </a:prstGeom>
+          <a:solidFill>
+            <a:srgbClr val="F3F3F3"/>
+          </a:solidFill>
+          <a:ln>
+            <a:noFill/>
+          </a:ln>
+        </p:spPr>
+        <p:txBody>
+          <a:bodyPr rtlCol="0" anchor="ctr" wrap="square" lIns="201168" rIns="201168" tIns="201168" bIns="201168"/>
+          <a:lstStyle/>
+          <a:p>
+            <a:pPr algn="l">
+              <a:lnSpc>
+                <a:spcPct val="100000"/>
+              </a:lnSpc>
+              <a:spcBef>
+                <a:spcPts val="0"/>
+              </a:spcBef>
+              <a:spcAft>
+                <a:spcPts val="0"/>
+              </a:spcAft>
+            </a:pPr>
+            <a:r>
+              <a:rPr sz="1700" b="1" i="0">
+                <a:solidFill>
+                  <a:srgbClr val="0B5394"/>
+                </a:solidFill>
+                <a:latin typeface="Calibri"/>
+              </a:rPr>
+              <a:t>O que acontece</a:t>
+            </a:r>
+          </a:p>
+          <a:p>
+            <a:pPr algn="l">
+              <a:lnSpc>
+                <a:spcPct val="100000"/>
+              </a:lnSpc>
+              <a:spcBef>
+                <a:spcPts val="400"/>
+              </a:spcBef>
+              <a:spcAft>
+                <a:spcPts val="0"/>
+              </a:spcAft>
+            </a:pPr>
+            <a:r>
+              <a:rPr sz="1400" b="0" i="0">
+                <a:solidFill>
+                  <a:srgbClr val="1F1F1F"/>
+                </a:solidFill>
+                <a:latin typeface="Calibri"/>
+              </a:rPr>
+              <a:t>A termelétrica usa gás processado (estágio 3) para gerar eletricidade (estágio 2).</a:t>
+            </a:r>
+          </a:p>
+        </p:txBody>
+      </p:sp>
+      <p:sp>
+        <p:nvSpPr>
+          <p:cNvPr id="55" name="Não é erro do modelo"/>
+          <p:cNvSpPr/>
+          <p:nvPr/>
+        </p:nvSpPr>
+        <p:spPr>
+          <a:xfrm>
+            <a:off x="4448556" y="4526280"/>
+            <a:ext cx="3291840" cy="1691640"/>
+          </a:xfrm>
+          <a:prstGeom prst="roundRect">
+            <a:avLst>
+              <a:gd name="adj" fmla="val 6000"/>
+            </a:avLst>
+          </a:prstGeom>
+          <a:solidFill>
+            <a:srgbClr val="F3F3F3"/>
+          </a:solidFill>
+          <a:ln>
+            <a:noFill/>
+          </a:ln>
+        </p:spPr>
+        <p:txBody>
+          <a:bodyPr rtlCol="0" anchor="ctr" wrap="square" lIns="201168" rIns="201168" tIns="201168" bIns="201168"/>
+          <a:lstStyle/>
+          <a:p>
+            <a:pPr algn="l">
+              <a:lnSpc>
+                <a:spcPct val="100000"/>
+              </a:lnSpc>
+              <a:spcBef>
+                <a:spcPts val="0"/>
+              </a:spcBef>
+              <a:spcAft>
+                <a:spcPts val="0"/>
+              </a:spcAft>
+            </a:pPr>
+            <a:r>
+              <a:rPr sz="1700" b="1" i="0">
+                <a:solidFill>
+                  <a:srgbClr val="0B5394"/>
+                </a:solidFill>
+                <a:latin typeface="Calibri"/>
+              </a:rPr>
+              <a:t>Não é erro do modelo</a:t>
+            </a:r>
+          </a:p>
+          <a:p>
+            <a:pPr algn="l">
+              <a:lnSpc>
+                <a:spcPct val="100000"/>
+              </a:lnSpc>
+              <a:spcBef>
+                <a:spcPts val="400"/>
+              </a:spcBef>
+              <a:spcAft>
+                <a:spcPts val="0"/>
+              </a:spcAft>
+            </a:pPr>
+            <a:r>
+              <a:rPr sz="1400" b="0" i="0">
+                <a:solidFill>
+                  <a:srgbClr val="1F1F1F"/>
+                </a:solidFill>
+                <a:latin typeface="Calibri"/>
+              </a:rPr>
+              <a:t>A energia segue o sentido normal. Como a entrada está num estágio posterior ao da saída, a linha volta para a esquerda.</a:t>
+            </a:r>
+          </a:p>
+        </p:txBody>
+      </p:sp>
+      <p:sp>
+        <p:nvSpPr>
+          <p:cNvPr id="56" name="Detecção automática"/>
+          <p:cNvSpPr/>
+          <p:nvPr/>
+        </p:nvSpPr>
+        <p:spPr>
+          <a:xfrm>
+            <a:off x="7982712" y="4526280"/>
+            <a:ext cx="3291840" cy="1691640"/>
           </a:xfrm>
           <a:prstGeom prst="roundRect">
             <a:avLst>
@@ -17247,10 +19613,10 @@
           </a:ln>
         </p:spPr>
         <p:txBody>
-          <a:bodyPr rtlCol="0" anchor="ctr" wrap="square" lIns="137160" rIns="137160" tIns="137160" bIns="137160"/>
+          <a:bodyPr rtlCol="0" anchor="ctr" wrap="square" lIns="201168" rIns="201168" tIns="201168" bIns="201168"/>
           <a:lstStyle/>
           <a:p>
-            <a:pPr algn="ctr">
+            <a:pPr algn="l">
               <a:lnSpc>
                 <a:spcPct val="100000"/>
               </a:lnSpc>
@@ -17262,22 +19628,22 @@
               </a:spcAft>
             </a:pPr>
             <a:r>
-              <a:rPr sz="4800" b="1" i="0">
+              <a:rPr sz="1700" b="1" i="0">
                 <a:solidFill>
                   <a:srgbClr val="FFFFFF"/>
                 </a:solidFill>
                 <a:latin typeface="Calibri"/>
               </a:rPr>
-              <a:t>4</a:t>
+              <a:t>Detecção automática</a:t>
             </a:r>
           </a:p>
           <a:p>
-            <a:pPr algn="ctr">
+            <a:pPr algn="l">
               <a:lnSpc>
                 <a:spcPct val="100000"/>
               </a:lnSpc>
               <a:spcBef>
-                <a:spcPts val="0"/>
+                <a:spcPts val="400"/>
               </a:spcBef>
               <a:spcAft>
                 <a:spcPts val="0"/>
@@ -17290,142 +19656,7 @@
                 </a:solidFill>
                 <a:latin typeface="Calibri"/>
               </a:rPr>
-              <a:t>fluxos reversos detectados e roteados</a:t>
-            </a:r>
-          </a:p>
-        </p:txBody>
-      </p:sp>
-      <p:sp>
-        <p:nvSpPr>
-          <p:cNvPr id="7" name="TextBox 6"/>
-          <p:cNvSpPr txBox="1"/>
-          <p:nvPr/>
-        </p:nvSpPr>
-        <p:spPr>
-          <a:xfrm>
-            <a:off x="8503920" y="3611880"/>
-            <a:ext cx="2770631" cy="1828800"/>
-          </a:xfrm>
-          <a:prstGeom prst="rect">
-            <a:avLst/>
-          </a:prstGeom>
-          <a:noFill/>
-        </p:spPr>
-        <p:txBody>
-          <a:bodyPr wrap="square" anchor="t" lIns="0" rIns="0" tIns="0" bIns="0">
-            <a:spAutoFit/>
-          </a:bodyPr>
-          <a:lstStyle/>
-          <a:p>
-            <a:pPr algn="l">
-              <a:lnSpc>
-                <a:spcPct val="100000"/>
-              </a:lnSpc>
-              <a:spcBef>
-                <a:spcPts val="0"/>
-              </a:spcBef>
-              <a:spcAft>
-                <a:spcPts val="1000"/>
-              </a:spcAft>
-            </a:pPr>
-            <a:r>
-              <a:rPr sz="1500" b="1" i="0">
-                <a:solidFill>
-                  <a:srgbClr val="1F1F1F"/>
-                </a:solidFill>
-                <a:latin typeface="Calibri"/>
-              </a:rPr>
-              <a:t>Exemplo: </a:t>
-            </a:r>
-            <a:r>
-              <a:rPr sz="1500" b="0" i="0">
-                <a:solidFill>
-                  <a:srgbClr val="1F1F1F"/>
-                </a:solidFill>
-                <a:latin typeface="Calibri"/>
-              </a:rPr>
-              <a:t>PWRNGS1 consome gás processado (estágio 3) e gera eletricidade (estágio 2).</a:t>
-            </a:r>
-          </a:p>
-          <a:p>
-            <a:pPr algn="l">
-              <a:lnSpc>
-                <a:spcPct val="100000"/>
-              </a:lnSpc>
-              <a:spcBef>
-                <a:spcPts val="0"/>
-              </a:spcBef>
-              <a:spcAft>
-                <a:spcPts val="0"/>
-              </a:spcAft>
-            </a:pPr>
-            <a:r>
-              <a:rPr sz="1500" b="1" i="0">
-                <a:solidFill>
-                  <a:srgbClr val="1F1F1F"/>
-                </a:solidFill>
-                <a:latin typeface="Calibri"/>
-              </a:rPr>
-              <a:t>Detecção: </a:t>
-            </a:r>
-            <a:r>
-              <a:rPr sz="1500" b="0" i="0">
-                <a:solidFill>
-                  <a:srgbClr val="1F1F1F"/>
-                </a:solidFill>
-                <a:latin typeface="Calibri"/>
-              </a:rPr>
-              <a:t>comparação dos estágios de entrada e saída, sem declaração do usuário.</a:t>
-            </a:r>
-          </a:p>
-        </p:txBody>
-      </p:sp>
-      <p:sp>
-        <p:nvSpPr>
-          <p:cNvPr id="8" name="Contraste Sankey"/>
-          <p:cNvSpPr/>
-          <p:nvPr/>
-        </p:nvSpPr>
-        <p:spPr>
-          <a:xfrm>
-            <a:off x="914400" y="5257800"/>
-            <a:ext cx="10360152" cy="868680"/>
-          </a:xfrm>
-          <a:prstGeom prst="roundRect">
-            <a:avLst>
-              <a:gd name="adj" fmla="val 6000"/>
-            </a:avLst>
-          </a:prstGeom>
-          <a:solidFill>
-            <a:srgbClr val="EAF1F8"/>
-          </a:solidFill>
-          <a:ln>
-            <a:noFill/>
-          </a:ln>
-        </p:spPr>
-        <p:txBody>
-          <a:bodyPr rtlCol="0" anchor="ctr" wrap="square" lIns="228600" rIns="228600" tIns="228600" bIns="228600"/>
-          <a:lstStyle/>
-          <a:p>
-            <a:pPr algn="l">
-              <a:lnSpc>
-                <a:spcPct val="100000"/>
-              </a:lnSpc>
-              <a:spcBef>
-                <a:spcPts val="0"/>
-              </a:spcBef>
-              <a:spcAft>
-                <a:spcPts val="0"/>
-              </a:spcAft>
-            </a:pPr>
-            <a:r>
-              <a:rPr sz="1600" b="0" i="0">
-                <a:solidFill>
-                  <a:srgbClr val="1F1F1F"/>
-                </a:solidFill>
-                <a:latin typeface="Calibri"/>
-              </a:rPr>
-              <a:t>Visuais de Sankey rejeitam esse caso como ciclo ou o desenham sobreposto. Aqui ele ganha uma rota própria.</a:t>
+              <a:t>4 casos no sistema, identificados pela comparação dos estágios, sem declaração do usuário.</a:t>
             </a:r>
           </a:p>
         </p:txBody>
@@ -17521,14 +19752,122 @@
       </p:sp>
       <p:sp>
         <p:nvSpPr>
-          <p:cNvPr id="4" name="TextBox 3"/>
+          <p:cNvPr id="49" name="Google Shape;49;p8"/>
+          <p:cNvSpPr txBox="1"/>
+          <p:nvPr>
+            <p:ph idx="12" type="sldNum"/>
+          </p:nvPr>
+        </p:nvSpPr>
+        <p:spPr>
+          <a:xfrm>
+            <a:off x="8610600" y="6356350"/>
+            <a:ext cx="2743200" cy="365125"/>
+          </a:xfrm>
+          <a:prstGeom prst="rect">
+            <a:avLst/>
+          </a:prstGeom>
+          <a:noFill/>
+          <a:ln>
+            <a:noFill/>
+          </a:ln>
+        </p:spPr>
+        <p:txBody>
+          <a:bodyPr anchorCtr="0" anchor="ctr" bIns="45700" lIns="91425" spcFirstLastPara="1" rIns="91425" wrap="square" tIns="45700">
+            <a:noAutofit/>
+          </a:bodyPr>
+          <a:lstStyle>
+            <a:lvl1pPr indent="0" lvl="0" marL="0" algn="r">
+              <a:spcBef>
+                <a:spcPts val="0"/>
+              </a:spcBef>
+              <a:buNone/>
+              <a:defRPr/>
+            </a:lvl1pPr>
+            <a:lvl2pPr indent="0" lvl="1" marL="0" algn="r">
+              <a:spcBef>
+                <a:spcPts val="0"/>
+              </a:spcBef>
+              <a:buNone/>
+              <a:defRPr/>
+            </a:lvl2pPr>
+            <a:lvl3pPr indent="0" lvl="2" marL="0" algn="r">
+              <a:spcBef>
+                <a:spcPts val="0"/>
+              </a:spcBef>
+              <a:buNone/>
+              <a:defRPr/>
+            </a:lvl3pPr>
+            <a:lvl4pPr indent="0" lvl="3" marL="0" algn="r">
+              <a:spcBef>
+                <a:spcPts val="0"/>
+              </a:spcBef>
+              <a:buNone/>
+              <a:defRPr/>
+            </a:lvl4pPr>
+            <a:lvl5pPr indent="0" lvl="4" marL="0" algn="r">
+              <a:spcBef>
+                <a:spcPts val="0"/>
+              </a:spcBef>
+              <a:buNone/>
+              <a:defRPr/>
+            </a:lvl5pPr>
+            <a:lvl6pPr indent="0" lvl="5" marL="0" algn="r">
+              <a:spcBef>
+                <a:spcPts val="0"/>
+              </a:spcBef>
+              <a:buNone/>
+              <a:defRPr/>
+            </a:lvl6pPr>
+            <a:lvl7pPr indent="0" lvl="6" marL="0" algn="r">
+              <a:spcBef>
+                <a:spcPts val="0"/>
+              </a:spcBef>
+              <a:buNone/>
+              <a:defRPr/>
+            </a:lvl7pPr>
+            <a:lvl8pPr indent="0" lvl="7" marL="0" algn="r">
+              <a:spcBef>
+                <a:spcPts val="0"/>
+              </a:spcBef>
+              <a:buNone/>
+              <a:defRPr/>
+            </a:lvl8pPr>
+            <a:lvl9pPr indent="0" lvl="8" marL="0" algn="r">
+              <a:spcBef>
+                <a:spcPts val="0"/>
+              </a:spcBef>
+              <a:buNone/>
+              <a:defRPr/>
+            </a:lvl9pPr>
+          </a:lstStyle>
+          <a:p>
+            <a:pPr indent="0" lvl="0" marL="0" rtl="0" algn="r">
+              <a:spcBef>
+                <a:spcPts val="0"/>
+              </a:spcBef>
+              <a:spcAft>
+                <a:spcPts val="0"/>
+              </a:spcAft>
+              <a:buNone/>
+            </a:pPr>
+            <a:fld id="{00000000-1234-1234-1234-123412341234}" type="slidenum">
+              <a:rPr lang="pt-BR"/>
+              <a:t>‹#›</a:t>
+            </a:fld>
+            <a:endParaRPr/>
+          </a:p>
+        </p:txBody>
+      </p:sp>
+      <p:sp>
+        <p:nvSpPr>
+          <p:cNvPr id="50" name="TextBox 49"/>
           <p:cNvSpPr txBox="1"/>
           <p:nvPr/>
         </p:nvSpPr>
         <p:spPr>
           <a:xfrm>
             <a:off x="914400" y="1783080"/>
-            <a:ext cx="3291840" cy="320040"/>
+            <a:ext cx="4997196" cy="320040"/>
           </a:xfrm>
           <a:prstGeom prst="rect">
             <a:avLst/>
@@ -17553,20 +19892,20 @@
               </a:spcAft>
             </a:pPr>
             <a:r>
-              <a:rPr sz="1600" b="1" i="0">
+              <a:rPr sz="1700" b="1" i="0">
                 <a:solidFill>
                   <a:srgbClr val="0B5394"/>
                 </a:solidFill>
                 <a:latin typeface="Calibri"/>
               </a:rPr>
-              <a:t>1  Estado íntegro</a:t>
+              <a:t>Selecionando um grupo</a:t>
             </a:r>
           </a:p>
         </p:txBody>
       </p:sp>
       <p:pic>
         <p:nvPicPr>
-          <p:cNvPr id="5" name="1  Estado íntegro" descr="Figura6c.png"/>
+          <p:cNvPr id="51" name="Selecionando um grupo" descr="Figura6a.png"/>
           <p:cNvPicPr>
             <a:picLocks noChangeAspect="1"/>
           </p:cNvPicPr>
@@ -17581,7 +19920,7 @@
         <p:spPr>
           <a:xfrm>
             <a:off x="914400" y="2194560"/>
-            <a:ext cx="3291840" cy="2834639"/>
+            <a:ext cx="4929808" cy="2926080"/>
           </a:xfrm>
           <a:prstGeom prst="rect">
             <a:avLst/>
@@ -17595,14 +19934,14 @@
       </p:pic>
       <p:sp>
         <p:nvSpPr>
-          <p:cNvPr id="6" name="TextBox 5"/>
+          <p:cNvPr id="52" name="TextBox 51"/>
           <p:cNvSpPr txBox="1"/>
           <p:nvPr/>
         </p:nvSpPr>
         <p:spPr>
           <a:xfrm>
-            <a:off x="914400" y="5120640"/>
-            <a:ext cx="3291840" cy="457200"/>
+            <a:off x="914400" y="5193792"/>
+            <a:ext cx="4997196" cy="365760"/>
           </a:xfrm>
           <a:prstGeom prst="rect">
             <a:avLst/>
@@ -17627,27 +19966,27 @@
               </a:spcAft>
             </a:pPr>
             <a:r>
-              <a:rPr sz="1300" b="0" i="0">
+              <a:rPr sz="1400" b="0" i="0">
                 <a:solidFill>
                   <a:srgbClr val="595959"/>
                 </a:solidFill>
                 <a:latin typeface="Calibri"/>
               </a:rPr>
-              <a:t>Todas as cadeias em opacidade plena</a:t>
+              <a:t>Biomassa e cana têm a mesma cor: o grupo todo é destacado</a:t>
             </a:r>
           </a:p>
         </p:txBody>
       </p:sp>
       <p:sp>
         <p:nvSpPr>
-          <p:cNvPr id="7" name="TextBox 6"/>
+          <p:cNvPr id="53" name="TextBox 52"/>
           <p:cNvSpPr txBox="1"/>
           <p:nvPr/>
         </p:nvSpPr>
         <p:spPr>
           <a:xfrm>
-            <a:off x="4448556" y="1783080"/>
-            <a:ext cx="3291840" cy="320040"/>
+            <a:off x="6277356" y="1783080"/>
+            <a:ext cx="4997196" cy="320040"/>
           </a:xfrm>
           <a:prstGeom prst="rect">
             <a:avLst/>
@@ -17672,20 +20011,20 @@
               </a:spcAft>
             </a:pPr>
             <a:r>
-              <a:rPr sz="1600" b="1" i="0">
+              <a:rPr sz="1700" b="1" i="0">
                 <a:solidFill>
                   <a:srgbClr val="0B5394"/>
                 </a:solidFill>
                 <a:latin typeface="Calibri"/>
               </a:rPr>
-              <a:t>2  Clique em BIO</a:t>
+              <a:t>Selecionando uma cadeia</a:t>
             </a:r>
           </a:p>
         </p:txBody>
       </p:sp>
       <p:pic>
         <p:nvPicPr>
-          <p:cNvPr id="8" name="2  Clique em BIO" descr="Figura6a.png"/>
+          <p:cNvPr id="54" name="Selecionando uma cadeia" descr="Figura6b.png"/>
           <p:cNvPicPr>
             <a:picLocks noChangeAspect="1"/>
           </p:cNvPicPr>
@@ -17699,8 +20038,8 @@
         </p:blipFill>
         <p:spPr>
           <a:xfrm>
-            <a:off x="4448556" y="2194560"/>
-            <a:ext cx="3291840" cy="1953866"/>
+            <a:off x="6277356" y="2194560"/>
+            <a:ext cx="3597776" cy="2926080"/>
           </a:xfrm>
           <a:prstGeom prst="rect">
             <a:avLst/>
@@ -17714,14 +20053,14 @@
       </p:pic>
       <p:sp>
         <p:nvSpPr>
-          <p:cNvPr id="9" name="TextBox 8"/>
+          <p:cNvPr id="55" name="TextBox 54"/>
           <p:cNvSpPr txBox="1"/>
           <p:nvPr/>
         </p:nvSpPr>
         <p:spPr>
           <a:xfrm>
-            <a:off x="4448556" y="5120640"/>
-            <a:ext cx="3291840" cy="457200"/>
+            <a:off x="6277356" y="5193792"/>
+            <a:ext cx="4997196" cy="365760"/>
           </a:xfrm>
           <a:prstGeom prst="rect">
             <a:avLst/>
@@ -17746,146 +20085,27 @@
               </a:spcAft>
             </a:pPr>
             <a:r>
-              <a:rPr sz="1300" b="0" i="0">
+              <a:rPr sz="1400" b="0" i="0">
                 <a:solidFill>
                   <a:srgbClr val="595959"/>
                 </a:solidFill>
                 <a:latin typeface="Calibri"/>
               </a:rPr>
-              <a:t>BIO e CAN têm a mesma cor: o grupo acende junto</a:t>
+              <a:t>O carvão tem cor exclusiva: só a sua cadeia é destacada</a:t>
             </a:r>
           </a:p>
         </p:txBody>
       </p:sp>
       <p:sp>
         <p:nvSpPr>
-          <p:cNvPr id="10" name="TextBox 9"/>
-          <p:cNvSpPr txBox="1"/>
-          <p:nvPr/>
-        </p:nvSpPr>
-        <p:spPr>
-          <a:xfrm>
-            <a:off x="7982712" y="1783080"/>
-            <a:ext cx="3291840" cy="320040"/>
-          </a:xfrm>
-          <a:prstGeom prst="rect">
-            <a:avLst/>
-          </a:prstGeom>
-          <a:noFill/>
-        </p:spPr>
-        <p:txBody>
-          <a:bodyPr wrap="square" anchor="t" lIns="0" rIns="0" tIns="0" bIns="0">
-            <a:spAutoFit/>
-          </a:bodyPr>
-          <a:lstStyle/>
-          <a:p>
-            <a:pPr algn="l">
-              <a:lnSpc>
-                <a:spcPct val="100000"/>
-              </a:lnSpc>
-              <a:spcBef>
-                <a:spcPts val="0"/>
-              </a:spcBef>
-              <a:spcAft>
-                <a:spcPts val="0"/>
-              </a:spcAft>
-            </a:pPr>
-            <a:r>
-              <a:rPr sz="1600" b="1" i="0">
-                <a:solidFill>
-                  <a:srgbClr val="0B5394"/>
-                </a:solidFill>
-                <a:latin typeface="Calibri"/>
-              </a:rPr>
-              <a:t>3  Clique em COA</a:t>
-            </a:r>
-          </a:p>
-        </p:txBody>
-      </p:sp>
-      <p:pic>
-        <p:nvPicPr>
-          <p:cNvPr id="11" name="3  Clique em COA" descr="Figura6b.png"/>
-          <p:cNvPicPr>
-            <a:picLocks noChangeAspect="1"/>
-          </p:cNvPicPr>
-          <p:nvPr/>
-        </p:nvPicPr>
-        <p:blipFill>
-          <a:blip r:embed="rId5"/>
-          <a:stretch>
-            <a:fillRect/>
-          </a:stretch>
-        </p:blipFill>
-        <p:spPr>
-          <a:xfrm>
-            <a:off x="7982712" y="2194560"/>
-            <a:ext cx="3291840" cy="2677260"/>
-          </a:xfrm>
-          <a:prstGeom prst="rect">
-            <a:avLst/>
-          </a:prstGeom>
-          <a:ln w="9525">
-            <a:solidFill>
-              <a:srgbClr val="D9D9D9"/>
-            </a:solidFill>
-          </a:ln>
-        </p:spPr>
-      </p:pic>
-      <p:sp>
-        <p:nvSpPr>
-          <p:cNvPr id="12" name="TextBox 11"/>
-          <p:cNvSpPr txBox="1"/>
-          <p:nvPr/>
-        </p:nvSpPr>
-        <p:spPr>
-          <a:xfrm>
-            <a:off x="7982712" y="5120640"/>
-            <a:ext cx="3291840" cy="457200"/>
-          </a:xfrm>
-          <a:prstGeom prst="rect">
-            <a:avLst/>
-          </a:prstGeom>
-          <a:noFill/>
-        </p:spPr>
-        <p:txBody>
-          <a:bodyPr wrap="square" anchor="t" lIns="0" rIns="0" tIns="0" bIns="0">
-            <a:spAutoFit/>
-          </a:bodyPr>
-          <a:lstStyle/>
-          <a:p>
-            <a:pPr algn="l">
-              <a:lnSpc>
-                <a:spcPct val="100000"/>
-              </a:lnSpc>
-              <a:spcBef>
-                <a:spcPts val="0"/>
-              </a:spcBef>
-              <a:spcAft>
-                <a:spcPts val="0"/>
-              </a:spcAft>
-            </a:pPr>
-            <a:r>
-              <a:rPr sz="1300" b="0" i="0">
-                <a:solidFill>
-                  <a:srgbClr val="595959"/>
-                </a:solidFill>
-                <a:latin typeface="Calibri"/>
-              </a:rPr>
-              <a:t>Cor exclusiva: só a cadeia do carvão</a:t>
-            </a:r>
-          </a:p>
-        </p:txBody>
-      </p:sp>
-      <p:sp>
-        <p:nvSpPr>
-          <p:cNvPr id="13" name="Opacidade"/>
+          <p:cNvPr id="56" name="Esmaecimento"/>
           <p:cNvSpPr/>
           <p:nvPr/>
         </p:nvSpPr>
         <p:spPr>
           <a:xfrm>
             <a:off x="914400" y="5623560"/>
-            <a:ext cx="10360152" cy="685800"/>
+            <a:ext cx="10360152" cy="594360"/>
           </a:xfrm>
           <a:prstGeom prst="roundRect">
             <a:avLst>
@@ -17915,22 +20135,13 @@
               </a:spcAft>
             </a:pPr>
             <a:r>
-              <a:rPr sz="1500" b="1" i="0">
-                <a:solidFill>
-                  <a:srgbClr val="0B5394"/>
+              <a:rPr sz="1500" b="0" i="0">
+                <a:solidFill>
+                  <a:srgbClr val="1F1F1F"/>
                 </a:solidFill>
                 <a:latin typeface="Calibri"/>
               </a:rPr>
-              <a:t>Destaque por opacidade, não por remoção: </a:t>
-            </a:r>
-            <a:r>
-              <a:rPr sz="1500" b="0" i="0">
-                <a:solidFill>
-                  <a:srgbClr val="1F1F1F"/>
-                </a:solidFill>
-                <a:latin typeface="Calibri"/>
-              </a:rPr>
-              <a:t>o contexto continua visível. Linha de 2 px, área de clique de 45 px.</a:t>
+              <a:t>Ao clicar em um combustível ou tecnologia, as demais cadeias ficam esmaecidas, mas continuam visíveis como contexto.</a:t>
             </a:r>
           </a:p>
         </p:txBody>

--- a/Apresentacao/Apresentacao_XVI_Seminario_PIBITI.pptx
+++ b/Apresentacao/Apresentacao_XVI_Seminario_PIBITI.pptx
@@ -13458,7 +13458,7 @@
                 <a:latin typeface="Calibri"/>
                 <a:hlinkClick r:id="rId3"/>
               </a:rPr>
-              <a:t>github.com/Freddieij/Power_BI_Borba</a:t>
+              <a:t>github.com/Freddieij/DDFE</a:t>
             </a:r>
           </a:p>
         </p:txBody>
@@ -13674,7 +13674,7 @@
                 <a:cs typeface="Arial"/>
                 <a:sym typeface="Arial"/>
               </a:rPr>
-              <a:t>github.com/Freddieij/Power_BI_Borba  ·  Apoio: CNPq (PIBITI/PIBINOVA UFF 2025-2026)</a:t>
+              <a:t>github.com/Freddieij/DDFE  ·  Apoio: CNPq (PIBITI/PIBINOVA UFF 2025-2026)</a:t>
             </a:r>
             <a:endParaRPr sz="2400"/>
           </a:p>
@@ -16688,30 +16688,7 @@
                 <a:latin typeface="Calibri"/>
                 <a:hlinkClick r:id="rId3"/>
               </a:rPr>
-              <a:t>github.com/Freddieij/</a:t>
-            </a:r>
-          </a:p>
-          <a:p>
-            <a:pPr algn="l">
-              <a:lnSpc>
-                <a:spcPct val="100000"/>
-              </a:lnSpc>
-              <a:spcBef>
-                <a:spcPts val="200"/>
-              </a:spcBef>
-              <a:spcAft>
-                <a:spcPts val="0"/>
-              </a:spcAft>
-            </a:pPr>
-            <a:r>
-              <a:rPr sz="1300" b="0" i="0">
-                <a:solidFill>
-                  <a:srgbClr val="0B5394"/>
-                </a:solidFill>
-                <a:latin typeface="Calibri"/>
-                <a:hlinkClick r:id="rId3"/>
-              </a:rPr>
-              <a:t>Power_BI_Borba</a:t>
+              <a:t>github.com/Freddieij/DDFE</a:t>
             </a:r>
           </a:p>
         </p:txBody>

--- a/Apresentacao/Apresentacao_XVI_Seminario_PIBITI.pptx
+++ b/Apresentacao/Apresentacao_XVI_Seminario_PIBITI.pptx
@@ -1342,7 +1342,7 @@
           <a:lstStyle/>
           <a:p>
             <a:r>
-              <a:t>[~45 s] Um caso que os visuais prontos não tratam é a conexão de retorno. A termelétrica a gás natural usa gás processado, que está no estágio 3, para gerar eletricidade, que está no estágio 2. Isso não é erro do modelo: a energia segue o sentido normal, do gás para a eletricidade. Mas, como as colunas seguem o estágio, a entrada fica à direita da saída, e a linha precisa voltar para a esquerda, contornando as caixas. O cálculo detecta esses casos comparando os estágios de entrada e saída, sem o usuário declarar nada. No sistema de validação há quatro casos, todos desenhados automaticamente.</a:t>
+              <a:t>[~45 s] Um caso que os visuais prontos não tratam é a conexão de retorno. A termelétrica a gás natural usa gás processado, que está no estágio 3, para gerar eletricidade, que está no estágio 2. Isso não é erro do modelo: a energia segue o sentido normal, do gás para a eletricidade. Mas, como as colunas seguem o estágio, a entrada fica à direita da saída, e a linha precisa voltar para a esquerda, contornando as caixas. A faixa cinza é só um trecho omitido da figura, onde ficam outras colunas do estágio 3, para caber o zoom. O cálculo detecta esses casos comparando os estágios de entrada e saída, sem o usuário declarar nada. No sistema de validação há quatro casos, todos desenhados automaticamente.</a:t>
             </a:r>
           </a:p>
         </p:txBody>
@@ -19266,7 +19266,7 @@
         </p:nvSpPr>
         <p:spPr>
           <a:xfrm>
-            <a:off x="5956567" y="1737360"/>
+            <a:off x="6112658" y="1737360"/>
             <a:ext cx="3200400" cy="320040"/>
           </a:xfrm>
           <a:prstGeom prst="rect">
@@ -19320,7 +19320,7 @@
         <p:spPr>
           <a:xfrm>
             <a:off x="914400" y="2103120"/>
-            <a:ext cx="10360152" cy="1832291"/>
+            <a:ext cx="10360152" cy="1702820"/>
           </a:xfrm>
           <a:prstGeom prst="rect">
             <a:avLst/>
@@ -19340,7 +19340,7 @@
         </p:nvSpPr>
         <p:spPr>
           <a:xfrm>
-            <a:off x="2237121" y="3981131"/>
+            <a:off x="2053200" y="3851660"/>
             <a:ext cx="2560320" cy="320040"/>
           </a:xfrm>
           <a:prstGeom prst="rect">
@@ -19385,8 +19385,8 @@
         </p:nvSpPr>
         <p:spPr>
           <a:xfrm>
-            <a:off x="5781834" y="3981131"/>
-            <a:ext cx="2560320" cy="320040"/>
+            <a:off x="5530322" y="3851660"/>
+            <a:ext cx="2194560" cy="320040"/>
           </a:xfrm>
           <a:prstGeom prst="rect">
             <a:avLst/>
@@ -19424,7 +19424,52 @@
       </p:sp>
       <p:sp>
         <p:nvSpPr>
-          <p:cNvPr id="54" name="O que acontece"/>
+          <p:cNvPr id="54" name="TextBox 53"/>
+          <p:cNvSpPr txBox="1"/>
+          <p:nvPr/>
+        </p:nvSpPr>
+        <p:spPr>
+          <a:xfrm>
+            <a:off x="7753999" y="3851660"/>
+            <a:ext cx="1280160" cy="320040"/>
+          </a:xfrm>
+          <a:prstGeom prst="rect">
+            <a:avLst/>
+          </a:prstGeom>
+          <a:noFill/>
+        </p:spPr>
+        <p:txBody>
+          <a:bodyPr wrap="square" anchor="t" lIns="0" rIns="0" tIns="0" bIns="0">
+            <a:spAutoFit/>
+          </a:bodyPr>
+          <a:lstStyle/>
+          <a:p>
+            <a:pPr algn="ctr">
+              <a:lnSpc>
+                <a:spcPct val="100000"/>
+              </a:lnSpc>
+              <a:spcBef>
+                <a:spcPts val="0"/>
+              </a:spcBef>
+              <a:spcAft>
+                <a:spcPts val="0"/>
+              </a:spcAft>
+            </a:pPr>
+            <a:r>
+              <a:rPr sz="1200" b="0" i="1">
+                <a:solidFill>
+                  <a:srgbClr val="595959"/>
+                </a:solidFill>
+                <a:latin typeface="Calibri"/>
+              </a:rPr>
+              <a:t>↑  trecho omitido</a:t>
+            </a:r>
+          </a:p>
+        </p:txBody>
+      </p:sp>
+      <p:sp>
+        <p:nvSpPr>
+          <p:cNvPr id="55" name="O que acontece"/>
           <p:cNvSpPr/>
           <p:nvPr/>
         </p:nvSpPr>
@@ -19496,7 +19541,7 @@
       </p:sp>
       <p:sp>
         <p:nvSpPr>
-          <p:cNvPr id="55" name="Não é erro do modelo"/>
+          <p:cNvPr id="56" name="Não é erro do modelo"/>
           <p:cNvSpPr/>
           <p:nvPr/>
         </p:nvSpPr>
@@ -19568,7 +19613,7 @@
       </p:sp>
       <p:sp>
         <p:nvSpPr>
-          <p:cNvPr id="56" name="Detecção automática"/>
+          <p:cNvPr id="57" name="Detecção automática"/>
           <p:cNvSpPr/>
           <p:nvPr/>
         </p:nvSpPr>
